--- a/slides/3-3_inhalational_anesthetics/3-3_inhalational_anesthetics.pptx
+++ b/slides/3-3_inhalational_anesthetics/3-3_inhalational_anesthetics.pptx
@@ -2196,7 +2196,7 @@
           <a:ln/>
         </p:spPr>
         <p:txBody>
-          <a:bodyPr wrap="square" lIns="0" tIns="0" rIns="0" bIns="0" rtlCol="0" anchor="ctr"/>
+          <a:bodyPr wrap="none" lIns="0" tIns="0" rIns="0" bIns="0" rtlCol="0" anchor="ctr"/>
           <a:lstStyle/>
           <a:p>
             <a:pPr algn="ctr" indent="0" marL="0">
@@ -2239,7 +2239,7 @@
           <a:ln/>
         </p:spPr>
         <p:txBody>
-          <a:bodyPr wrap="square" lIns="0" tIns="0" rIns="0" bIns="0" rtlCol="0" anchor="ctr"/>
+          <a:bodyPr wrap="none" lIns="0" tIns="0" rIns="0" bIns="0" rtlCol="0" anchor="ctr"/>
           <a:lstStyle/>
           <a:p>
             <a:pPr algn="ctr" indent="0" marL="0">
@@ -2282,7 +2282,7 @@
           <a:ln/>
         </p:spPr>
         <p:txBody>
-          <a:bodyPr wrap="square" lIns="0" tIns="0" rIns="0" bIns="0" rtlCol="0" anchor="ctr"/>
+          <a:bodyPr wrap="none" lIns="0" tIns="0" rIns="0" bIns="0" rtlCol="0" anchor="ctr"/>
           <a:lstStyle/>
           <a:p>
             <a:pPr algn="ctr" indent="0" marL="0">
@@ -2342,7 +2342,7 @@
           <a:ln/>
         </p:spPr>
         <p:txBody>
-          <a:bodyPr wrap="square" lIns="0" tIns="0" rIns="0" bIns="0" rtlCol="0" anchor="ctr"/>
+          <a:bodyPr wrap="none" lIns="0" tIns="0" rIns="0" bIns="0" rtlCol="0" anchor="ctr"/>
           <a:lstStyle/>
           <a:p>
             <a:pPr algn="ctr" indent="0" marL="0">
@@ -2402,7 +2402,7 @@
           <a:ln/>
         </p:spPr>
         <p:txBody>
-          <a:bodyPr wrap="square" lIns="0" tIns="0" rIns="0" bIns="0" rtlCol="0" anchor="ctr"/>
+          <a:bodyPr wrap="none" lIns="0" tIns="0" rIns="0" bIns="0" rtlCol="0" anchor="ctr"/>
           <a:lstStyle/>
           <a:p>
             <a:pPr algn="ctr" indent="0" marL="0">
@@ -2526,7 +2526,7 @@
         </p:nvSpPr>
         <p:spPr>
           <a:xfrm>
-            <a:off x="1188720" y="3017520"/>
+            <a:off x="1188720" y="3200400"/>
             <a:ext cx="5120640" cy="0"/>
           </a:xfrm>
           <a:prstGeom prst="line">
@@ -2537,7 +2537,7 @@
             <a:solidFill>
               <a:srgbClr val="7F7F7F"/>
             </a:solidFill>
-            <a:prstDash val="dash"/>
+            <a:prstDash val="sysDot"/>
           </a:ln>
         </p:spPr>
       </p:sp>
@@ -2549,8 +2549,8 @@
         </p:nvSpPr>
         <p:spPr>
           <a:xfrm>
-            <a:off x="1188720" y="2845613"/>
-            <a:ext cx="9144" cy="2183587"/>
+            <a:off x="1188720" y="3074213"/>
+            <a:ext cx="9144" cy="2046427"/>
           </a:xfrm>
           <a:custGeom>
             <a:avLst/>
@@ -2559,9 +2559,9 @@
             <a:cxnLst/>
             <a:rect l="l" t="t" r="r" b="b"/>
             <a:pathLst>
-              <a:path w="9144" h="2183587">
+              <a:path w="9144" h="2046427">
                 <a:moveTo>
-                  <a:pt x="0" y="2183587"/>
+                  <a:pt x="0" y="2046427"/>
                 </a:moveTo>
                 <a:lnTo>
                   <a:pt x="0" y="0"/>
@@ -2586,7 +2586,7 @@
         </p:nvSpPr>
         <p:spPr>
           <a:xfrm>
-            <a:off x="1115568" y="2743200"/>
+            <a:off x="1115568" y="2971800"/>
             <a:ext cx="146304" cy="146304"/>
           </a:xfrm>
           <a:custGeom>
@@ -2629,7 +2629,7 @@
         </p:nvSpPr>
         <p:spPr>
           <a:xfrm>
-            <a:off x="1188720" y="5029200"/>
+            <a:off x="1188720" y="5120640"/>
             <a:ext cx="5246827" cy="9144"/>
           </a:xfrm>
           <a:custGeom>
@@ -2666,7 +2666,7 @@
         </p:nvSpPr>
         <p:spPr>
           <a:xfrm>
-            <a:off x="6391656" y="4956048"/>
+            <a:off x="6391656" y="5047488"/>
             <a:ext cx="146304" cy="146304"/>
           </a:xfrm>
           <a:custGeom>
@@ -2709,8 +2709,8 @@
         </p:nvSpPr>
         <p:spPr>
           <a:xfrm>
-            <a:off x="1216152" y="3259836"/>
-            <a:ext cx="5093208" cy="1769364"/>
+            <a:off x="1216152" y="3431743"/>
+            <a:ext cx="5093208" cy="1688897"/>
           </a:xfrm>
           <a:custGeom>
             <a:avLst/>
@@ -2719,447 +2719,447 @@
             <a:cxnLst/>
             <a:rect l="l" t="t" r="r" b="b"/>
             <a:pathLst>
-              <a:path w="5093208" h="1769364">
+              <a:path w="5093208" h="1688897">
                 <a:moveTo>
-                  <a:pt x="0" y="1769364"/>
+                  <a:pt x="0" y="1688897"/>
                 </a:moveTo>
                 <a:lnTo>
-                  <a:pt x="33833" y="1591056"/>
-                </a:lnTo>
-                <a:lnTo>
-                  <a:pt x="67666" y="1436522"/>
-                </a:lnTo>
-                <a:lnTo>
-                  <a:pt x="101498" y="1303934"/>
-                </a:lnTo>
-                <a:lnTo>
-                  <a:pt x="136246" y="1189634"/>
-                </a:lnTo>
-                <a:lnTo>
-                  <a:pt x="170078" y="1089965"/>
-                </a:lnTo>
-                <a:lnTo>
-                  <a:pt x="203911" y="1004011"/>
-                </a:lnTo>
-                <a:lnTo>
-                  <a:pt x="237744" y="929945"/>
-                </a:lnTo>
-                <a:lnTo>
-                  <a:pt x="271577" y="865022"/>
-                </a:lnTo>
-                <a:lnTo>
-                  <a:pt x="305410" y="808330"/>
-                </a:lnTo>
-                <a:lnTo>
-                  <a:pt x="339242" y="759866"/>
-                </a:lnTo>
-                <a:lnTo>
-                  <a:pt x="373075" y="716890"/>
-                </a:lnTo>
-                <a:lnTo>
-                  <a:pt x="407822" y="679399"/>
-                </a:lnTo>
-                <a:lnTo>
-                  <a:pt x="441655" y="646481"/>
-                </a:lnTo>
-                <a:lnTo>
-                  <a:pt x="475488" y="617220"/>
-                </a:lnTo>
-                <a:lnTo>
-                  <a:pt x="509321" y="591617"/>
-                </a:lnTo>
-                <a:lnTo>
-                  <a:pt x="543154" y="568757"/>
-                </a:lnTo>
-                <a:lnTo>
-                  <a:pt x="576986" y="548640"/>
-                </a:lnTo>
-                <a:lnTo>
-                  <a:pt x="610819" y="530352"/>
-                </a:lnTo>
-                <a:lnTo>
-                  <a:pt x="645566" y="513893"/>
-                </a:lnTo>
-                <a:lnTo>
-                  <a:pt x="679399" y="499262"/>
-                </a:lnTo>
-                <a:lnTo>
-                  <a:pt x="713232" y="485546"/>
-                </a:lnTo>
-                <a:lnTo>
-                  <a:pt x="747065" y="473659"/>
-                </a:lnTo>
-                <a:lnTo>
-                  <a:pt x="780898" y="461772"/>
-                </a:lnTo>
-                <a:lnTo>
-                  <a:pt x="814730" y="451714"/>
-                </a:lnTo>
-                <a:lnTo>
-                  <a:pt x="848563" y="442570"/>
-                </a:lnTo>
-                <a:lnTo>
-                  <a:pt x="882396" y="433426"/>
-                </a:lnTo>
-                <a:lnTo>
-                  <a:pt x="917143" y="425196"/>
-                </a:lnTo>
-                <a:lnTo>
-                  <a:pt x="950976" y="416966"/>
-                </a:lnTo>
-                <a:lnTo>
-                  <a:pt x="984809" y="409651"/>
-                </a:lnTo>
-                <a:lnTo>
-                  <a:pt x="1018642" y="402336"/>
-                </a:lnTo>
-                <a:lnTo>
-                  <a:pt x="1052474" y="395935"/>
-                </a:lnTo>
-                <a:lnTo>
-                  <a:pt x="1086307" y="389534"/>
-                </a:lnTo>
-                <a:lnTo>
-                  <a:pt x="1120140" y="383134"/>
-                </a:lnTo>
-                <a:lnTo>
-                  <a:pt x="1154887" y="376733"/>
-                </a:lnTo>
-                <a:lnTo>
-                  <a:pt x="1188720" y="371246"/>
-                </a:lnTo>
-                <a:lnTo>
-                  <a:pt x="1222553" y="365760"/>
-                </a:lnTo>
-                <a:lnTo>
-                  <a:pt x="1256386" y="360274"/>
-                </a:lnTo>
-                <a:lnTo>
-                  <a:pt x="1290218" y="354787"/>
-                </a:lnTo>
-                <a:lnTo>
-                  <a:pt x="1324051" y="349301"/>
-                </a:lnTo>
-                <a:lnTo>
-                  <a:pt x="1357884" y="344729"/>
-                </a:lnTo>
-                <a:lnTo>
-                  <a:pt x="1391717" y="339242"/>
-                </a:lnTo>
-                <a:lnTo>
-                  <a:pt x="1426464" y="334670"/>
-                </a:lnTo>
-                <a:lnTo>
-                  <a:pt x="1460297" y="330098"/>
-                </a:lnTo>
-                <a:lnTo>
-                  <a:pt x="1494130" y="324612"/>
-                </a:lnTo>
-                <a:lnTo>
-                  <a:pt x="1527962" y="320040"/>
-                </a:lnTo>
-                <a:lnTo>
-                  <a:pt x="1561795" y="315468"/>
-                </a:lnTo>
-                <a:lnTo>
-                  <a:pt x="1595628" y="310896"/>
-                </a:lnTo>
-                <a:lnTo>
-                  <a:pt x="1629461" y="306324"/>
-                </a:lnTo>
-                <a:lnTo>
-                  <a:pt x="1664208" y="301752"/>
-                </a:lnTo>
-                <a:lnTo>
-                  <a:pt x="1698041" y="297180"/>
-                </a:lnTo>
-                <a:lnTo>
-                  <a:pt x="1731874" y="293522"/>
-                </a:lnTo>
-                <a:lnTo>
-                  <a:pt x="1765706" y="288950"/>
-                </a:lnTo>
-                <a:lnTo>
-                  <a:pt x="1799539" y="284378"/>
-                </a:lnTo>
-                <a:lnTo>
-                  <a:pt x="1833372" y="280721"/>
-                </a:lnTo>
-                <a:lnTo>
-                  <a:pt x="1867205" y="276149"/>
-                </a:lnTo>
-                <a:lnTo>
-                  <a:pt x="1901038" y="271577"/>
-                </a:lnTo>
-                <a:lnTo>
-                  <a:pt x="1935785" y="267919"/>
-                </a:lnTo>
-                <a:lnTo>
-                  <a:pt x="1969618" y="263347"/>
-                </a:lnTo>
-                <a:lnTo>
-                  <a:pt x="2003450" y="259690"/>
-                </a:lnTo>
-                <a:lnTo>
-                  <a:pt x="2037283" y="256032"/>
-                </a:lnTo>
-                <a:lnTo>
-                  <a:pt x="2071116" y="251460"/>
-                </a:lnTo>
-                <a:lnTo>
-                  <a:pt x="2104949" y="247802"/>
-                </a:lnTo>
-                <a:lnTo>
-                  <a:pt x="2138782" y="244145"/>
-                </a:lnTo>
-                <a:lnTo>
-                  <a:pt x="2173529" y="239573"/>
-                </a:lnTo>
-                <a:lnTo>
-                  <a:pt x="2207362" y="235915"/>
-                </a:lnTo>
-                <a:lnTo>
-                  <a:pt x="2241194" y="232258"/>
-                </a:lnTo>
-                <a:lnTo>
-                  <a:pt x="2275027" y="228600"/>
-                </a:lnTo>
-                <a:lnTo>
-                  <a:pt x="2308860" y="224942"/>
-                </a:lnTo>
-                <a:lnTo>
-                  <a:pt x="2342693" y="221285"/>
-                </a:lnTo>
-                <a:lnTo>
-                  <a:pt x="2376526" y="217627"/>
-                </a:lnTo>
-                <a:lnTo>
-                  <a:pt x="2410358" y="213970"/>
-                </a:lnTo>
-                <a:lnTo>
-                  <a:pt x="2445106" y="210312"/>
-                </a:lnTo>
-                <a:lnTo>
-                  <a:pt x="2478938" y="206654"/>
-                </a:lnTo>
-                <a:lnTo>
-                  <a:pt x="2512771" y="202997"/>
-                </a:lnTo>
-                <a:lnTo>
-                  <a:pt x="2546604" y="199339"/>
-                </a:lnTo>
-                <a:lnTo>
-                  <a:pt x="2580437" y="195682"/>
-                </a:lnTo>
-                <a:lnTo>
-                  <a:pt x="2614270" y="192024"/>
-                </a:lnTo>
-                <a:lnTo>
-                  <a:pt x="2648102" y="189281"/>
-                </a:lnTo>
-                <a:lnTo>
-                  <a:pt x="2682850" y="185623"/>
-                </a:lnTo>
-                <a:lnTo>
-                  <a:pt x="2716682" y="181966"/>
-                </a:lnTo>
-                <a:lnTo>
-                  <a:pt x="2750515" y="178308"/>
-                </a:lnTo>
-                <a:lnTo>
-                  <a:pt x="2784348" y="175565"/>
-                </a:lnTo>
-                <a:lnTo>
-                  <a:pt x="2818181" y="171907"/>
-                </a:lnTo>
-                <a:lnTo>
-                  <a:pt x="2852014" y="168250"/>
-                </a:lnTo>
-                <a:lnTo>
-                  <a:pt x="2885846" y="165506"/>
-                </a:lnTo>
-                <a:lnTo>
-                  <a:pt x="2919679" y="161849"/>
-                </a:lnTo>
-                <a:lnTo>
-                  <a:pt x="2954426" y="159106"/>
-                </a:lnTo>
-                <a:lnTo>
-                  <a:pt x="2988259" y="155448"/>
-                </a:lnTo>
-                <a:lnTo>
-                  <a:pt x="3022092" y="152705"/>
-                </a:lnTo>
-                <a:lnTo>
-                  <a:pt x="3055925" y="149047"/>
-                </a:lnTo>
-                <a:lnTo>
-                  <a:pt x="3089758" y="146304"/>
-                </a:lnTo>
-                <a:lnTo>
-                  <a:pt x="3123590" y="143561"/>
-                </a:lnTo>
-                <a:lnTo>
-                  <a:pt x="3157423" y="139903"/>
-                </a:lnTo>
-                <a:lnTo>
-                  <a:pt x="3192170" y="137160"/>
-                </a:lnTo>
-                <a:lnTo>
-                  <a:pt x="3226003" y="134417"/>
-                </a:lnTo>
-                <a:lnTo>
-                  <a:pt x="3259836" y="130759"/>
-                </a:lnTo>
-                <a:lnTo>
-                  <a:pt x="3293669" y="128016"/>
-                </a:lnTo>
-                <a:lnTo>
-                  <a:pt x="3327502" y="125273"/>
-                </a:lnTo>
-                <a:lnTo>
-                  <a:pt x="3361334" y="122530"/>
-                </a:lnTo>
-                <a:lnTo>
-                  <a:pt x="3395167" y="118872"/>
-                </a:lnTo>
-                <a:lnTo>
-                  <a:pt x="3429000" y="116129"/>
-                </a:lnTo>
-                <a:lnTo>
-                  <a:pt x="3463747" y="113386"/>
-                </a:lnTo>
-                <a:lnTo>
-                  <a:pt x="3497580" y="110642"/>
-                </a:lnTo>
-                <a:lnTo>
-                  <a:pt x="3531413" y="107899"/>
-                </a:lnTo>
-                <a:lnTo>
-                  <a:pt x="3565246" y="105156"/>
-                </a:lnTo>
-                <a:lnTo>
-                  <a:pt x="3599078" y="102413"/>
-                </a:lnTo>
-                <a:lnTo>
-                  <a:pt x="3632911" y="99670"/>
-                </a:lnTo>
-                <a:lnTo>
-                  <a:pt x="3666744" y="96926"/>
-                </a:lnTo>
-                <a:lnTo>
-                  <a:pt x="3701491" y="94183"/>
-                </a:lnTo>
-                <a:lnTo>
-                  <a:pt x="3735324" y="91440"/>
-                </a:lnTo>
-                <a:lnTo>
-                  <a:pt x="3769157" y="88697"/>
-                </a:lnTo>
-                <a:lnTo>
-                  <a:pt x="3802990" y="85954"/>
-                </a:lnTo>
-                <a:lnTo>
-                  <a:pt x="3836822" y="83210"/>
-                </a:lnTo>
-                <a:lnTo>
-                  <a:pt x="3870655" y="81382"/>
-                </a:lnTo>
-                <a:lnTo>
-                  <a:pt x="3904488" y="78638"/>
-                </a:lnTo>
-                <a:lnTo>
-                  <a:pt x="3938321" y="75895"/>
-                </a:lnTo>
-                <a:lnTo>
-                  <a:pt x="3973068" y="73152"/>
-                </a:lnTo>
-                <a:lnTo>
-                  <a:pt x="4006901" y="70409"/>
-                </a:lnTo>
-                <a:lnTo>
-                  <a:pt x="4040734" y="68580"/>
-                </a:lnTo>
-                <a:lnTo>
-                  <a:pt x="4074566" y="65837"/>
-                </a:lnTo>
-                <a:lnTo>
-                  <a:pt x="4108399" y="63094"/>
-                </a:lnTo>
-                <a:lnTo>
-                  <a:pt x="4142232" y="61265"/>
-                </a:lnTo>
-                <a:lnTo>
-                  <a:pt x="4176065" y="58522"/>
-                </a:lnTo>
-                <a:lnTo>
-                  <a:pt x="4210812" y="55778"/>
-                </a:lnTo>
-                <a:lnTo>
-                  <a:pt x="4244645" y="53950"/>
-                </a:lnTo>
-                <a:lnTo>
-                  <a:pt x="4278478" y="51206"/>
-                </a:lnTo>
-                <a:lnTo>
-                  <a:pt x="4312310" y="49378"/>
-                </a:lnTo>
-                <a:lnTo>
-                  <a:pt x="4346143" y="46634"/>
-                </a:lnTo>
-                <a:lnTo>
-                  <a:pt x="4379976" y="44806"/>
-                </a:lnTo>
-                <a:lnTo>
-                  <a:pt x="4413809" y="42062"/>
-                </a:lnTo>
-                <a:lnTo>
-                  <a:pt x="4447642" y="40234"/>
-                </a:lnTo>
-                <a:lnTo>
-                  <a:pt x="4482389" y="37490"/>
-                </a:lnTo>
-                <a:lnTo>
-                  <a:pt x="4516222" y="35662"/>
-                </a:lnTo>
-                <a:lnTo>
-                  <a:pt x="4550054" y="32918"/>
-                </a:lnTo>
-                <a:lnTo>
-                  <a:pt x="4583887" y="31090"/>
-                </a:lnTo>
-                <a:lnTo>
-                  <a:pt x="4617720" y="28346"/>
-                </a:lnTo>
-                <a:lnTo>
-                  <a:pt x="4651553" y="26518"/>
-                </a:lnTo>
-                <a:lnTo>
-                  <a:pt x="4685386" y="24689"/>
-                </a:lnTo>
-                <a:lnTo>
-                  <a:pt x="4720133" y="21946"/>
-                </a:lnTo>
-                <a:lnTo>
-                  <a:pt x="4753966" y="20117"/>
-                </a:lnTo>
-                <a:lnTo>
-                  <a:pt x="4787798" y="18288"/>
-                </a:lnTo>
-                <a:lnTo>
-                  <a:pt x="4821631" y="16459"/>
+                  <a:pt x="33833" y="1518818"/>
+                </a:lnTo>
+                <a:lnTo>
+                  <a:pt x="67666" y="1371600"/>
+                </a:lnTo>
+                <a:lnTo>
+                  <a:pt x="101498" y="1244498"/>
+                </a:lnTo>
+                <a:lnTo>
+                  <a:pt x="136246" y="1134770"/>
+                </a:lnTo>
+                <a:lnTo>
+                  <a:pt x="170078" y="1040587"/>
+                </a:lnTo>
+                <a:lnTo>
+                  <a:pt x="203911" y="958291"/>
+                </a:lnTo>
+                <a:lnTo>
+                  <a:pt x="237744" y="886968"/>
+                </a:lnTo>
+                <a:lnTo>
+                  <a:pt x="271577" y="825703"/>
+                </a:lnTo>
+                <a:lnTo>
+                  <a:pt x="305410" y="771754"/>
+                </a:lnTo>
+                <a:lnTo>
+                  <a:pt x="339242" y="725119"/>
+                </a:lnTo>
+                <a:lnTo>
+                  <a:pt x="373075" y="683971"/>
+                </a:lnTo>
+                <a:lnTo>
+                  <a:pt x="407822" y="648310"/>
+                </a:lnTo>
+                <a:lnTo>
+                  <a:pt x="441655" y="617220"/>
+                </a:lnTo>
+                <a:lnTo>
+                  <a:pt x="475488" y="588874"/>
+                </a:lnTo>
+                <a:lnTo>
+                  <a:pt x="509321" y="564185"/>
+                </a:lnTo>
+                <a:lnTo>
+                  <a:pt x="543154" y="543154"/>
+                </a:lnTo>
+                <a:lnTo>
+                  <a:pt x="576986" y="523037"/>
+                </a:lnTo>
+                <a:lnTo>
+                  <a:pt x="610819" y="505663"/>
+                </a:lnTo>
+                <a:lnTo>
+                  <a:pt x="645566" y="490118"/>
+                </a:lnTo>
+                <a:lnTo>
+                  <a:pt x="679399" y="476402"/>
+                </a:lnTo>
+                <a:lnTo>
+                  <a:pt x="713232" y="463601"/>
+                </a:lnTo>
+                <a:lnTo>
+                  <a:pt x="747065" y="451714"/>
+                </a:lnTo>
+                <a:lnTo>
+                  <a:pt x="780898" y="440741"/>
+                </a:lnTo>
+                <a:lnTo>
+                  <a:pt x="814730" y="431597"/>
+                </a:lnTo>
+                <a:lnTo>
+                  <a:pt x="848563" y="422453"/>
+                </a:lnTo>
+                <a:lnTo>
+                  <a:pt x="882396" y="413309"/>
+                </a:lnTo>
+                <a:lnTo>
+                  <a:pt x="917143" y="405994"/>
+                </a:lnTo>
+                <a:lnTo>
+                  <a:pt x="950976" y="397764"/>
+                </a:lnTo>
+                <a:lnTo>
+                  <a:pt x="984809" y="391363"/>
+                </a:lnTo>
+                <a:lnTo>
+                  <a:pt x="1018642" y="384048"/>
+                </a:lnTo>
+                <a:lnTo>
+                  <a:pt x="1052474" y="377647"/>
+                </a:lnTo>
+                <a:lnTo>
+                  <a:pt x="1086307" y="371246"/>
+                </a:lnTo>
+                <a:lnTo>
+                  <a:pt x="1120140" y="365760"/>
+                </a:lnTo>
+                <a:lnTo>
+                  <a:pt x="1154887" y="360274"/>
+                </a:lnTo>
+                <a:lnTo>
+                  <a:pt x="1188720" y="354787"/>
+                </a:lnTo>
+                <a:lnTo>
+                  <a:pt x="1222553" y="349301"/>
+                </a:lnTo>
+                <a:lnTo>
+                  <a:pt x="1256386" y="343814"/>
+                </a:lnTo>
+                <a:lnTo>
+                  <a:pt x="1290218" y="338328"/>
+                </a:lnTo>
+                <a:lnTo>
+                  <a:pt x="1324051" y="333756"/>
+                </a:lnTo>
+                <a:lnTo>
+                  <a:pt x="1357884" y="329184"/>
+                </a:lnTo>
+                <a:lnTo>
+                  <a:pt x="1391717" y="323698"/>
+                </a:lnTo>
+                <a:lnTo>
+                  <a:pt x="1426464" y="319126"/>
+                </a:lnTo>
+                <a:lnTo>
+                  <a:pt x="1460297" y="314554"/>
+                </a:lnTo>
+                <a:lnTo>
+                  <a:pt x="1494130" y="309982"/>
+                </a:lnTo>
+                <a:lnTo>
+                  <a:pt x="1527962" y="305410"/>
+                </a:lnTo>
+                <a:lnTo>
+                  <a:pt x="1561795" y="300838"/>
+                </a:lnTo>
+                <a:lnTo>
+                  <a:pt x="1595628" y="297180"/>
+                </a:lnTo>
+                <a:lnTo>
+                  <a:pt x="1629461" y="292608"/>
+                </a:lnTo>
+                <a:lnTo>
+                  <a:pt x="1664208" y="288036"/>
+                </a:lnTo>
+                <a:lnTo>
+                  <a:pt x="1698041" y="284378"/>
+                </a:lnTo>
+                <a:lnTo>
+                  <a:pt x="1731874" y="279806"/>
+                </a:lnTo>
+                <a:lnTo>
+                  <a:pt x="1765706" y="276149"/>
+                </a:lnTo>
+                <a:lnTo>
+                  <a:pt x="1799539" y="271577"/>
+                </a:lnTo>
+                <a:lnTo>
+                  <a:pt x="1833372" y="267919"/>
+                </a:lnTo>
+                <a:lnTo>
+                  <a:pt x="1867205" y="263347"/>
+                </a:lnTo>
+                <a:lnTo>
+                  <a:pt x="1901038" y="259690"/>
+                </a:lnTo>
+                <a:lnTo>
+                  <a:pt x="1935785" y="256032"/>
+                </a:lnTo>
+                <a:lnTo>
+                  <a:pt x="1969618" y="251460"/>
+                </a:lnTo>
+                <a:lnTo>
+                  <a:pt x="2003450" y="247802"/>
+                </a:lnTo>
+                <a:lnTo>
+                  <a:pt x="2037283" y="244145"/>
+                </a:lnTo>
+                <a:lnTo>
+                  <a:pt x="2071116" y="240487"/>
+                </a:lnTo>
+                <a:lnTo>
+                  <a:pt x="2104949" y="236830"/>
+                </a:lnTo>
+                <a:lnTo>
+                  <a:pt x="2138782" y="233172"/>
+                </a:lnTo>
+                <a:lnTo>
+                  <a:pt x="2173529" y="228600"/>
+                </a:lnTo>
+                <a:lnTo>
+                  <a:pt x="2207362" y="224942"/>
+                </a:lnTo>
+                <a:lnTo>
+                  <a:pt x="2241194" y="221285"/>
+                </a:lnTo>
+                <a:lnTo>
+                  <a:pt x="2275027" y="218542"/>
+                </a:lnTo>
+                <a:lnTo>
+                  <a:pt x="2308860" y="214884"/>
+                </a:lnTo>
+                <a:lnTo>
+                  <a:pt x="2342693" y="211226"/>
+                </a:lnTo>
+                <a:lnTo>
+                  <a:pt x="2376526" y="207569"/>
+                </a:lnTo>
+                <a:lnTo>
+                  <a:pt x="2410358" y="203911"/>
+                </a:lnTo>
+                <a:lnTo>
+                  <a:pt x="2445106" y="200254"/>
+                </a:lnTo>
+                <a:lnTo>
+                  <a:pt x="2478938" y="196596"/>
+                </a:lnTo>
+                <a:lnTo>
+                  <a:pt x="2512771" y="193853"/>
+                </a:lnTo>
+                <a:lnTo>
+                  <a:pt x="2546604" y="190195"/>
+                </a:lnTo>
+                <a:lnTo>
+                  <a:pt x="2580437" y="186538"/>
+                </a:lnTo>
+                <a:lnTo>
+                  <a:pt x="2614270" y="183794"/>
+                </a:lnTo>
+                <a:lnTo>
+                  <a:pt x="2648102" y="180137"/>
+                </a:lnTo>
+                <a:lnTo>
+                  <a:pt x="2682850" y="176479"/>
+                </a:lnTo>
+                <a:lnTo>
+                  <a:pt x="2716682" y="173736"/>
+                </a:lnTo>
+                <a:lnTo>
+                  <a:pt x="2750515" y="170078"/>
+                </a:lnTo>
+                <a:lnTo>
+                  <a:pt x="2784348" y="167335"/>
+                </a:lnTo>
+                <a:lnTo>
+                  <a:pt x="2818181" y="163678"/>
+                </a:lnTo>
+                <a:lnTo>
+                  <a:pt x="2852014" y="160934"/>
+                </a:lnTo>
+                <a:lnTo>
+                  <a:pt x="2885846" y="158191"/>
+                </a:lnTo>
+                <a:lnTo>
+                  <a:pt x="2919679" y="154534"/>
+                </a:lnTo>
+                <a:lnTo>
+                  <a:pt x="2954426" y="151790"/>
+                </a:lnTo>
+                <a:lnTo>
+                  <a:pt x="2988259" y="148133"/>
+                </a:lnTo>
+                <a:lnTo>
+                  <a:pt x="3022092" y="145390"/>
+                </a:lnTo>
+                <a:lnTo>
+                  <a:pt x="3055925" y="142646"/>
+                </a:lnTo>
+                <a:lnTo>
+                  <a:pt x="3089758" y="139903"/>
+                </a:lnTo>
+                <a:lnTo>
+                  <a:pt x="3123590" y="136246"/>
+                </a:lnTo>
+                <a:lnTo>
+                  <a:pt x="3157423" y="133502"/>
+                </a:lnTo>
+                <a:lnTo>
+                  <a:pt x="3192170" y="130759"/>
+                </a:lnTo>
+                <a:lnTo>
+                  <a:pt x="3226003" y="128016"/>
+                </a:lnTo>
+                <a:lnTo>
+                  <a:pt x="3259836" y="125273"/>
+                </a:lnTo>
+                <a:lnTo>
+                  <a:pt x="3293669" y="122530"/>
+                </a:lnTo>
+                <a:lnTo>
+                  <a:pt x="3327502" y="119786"/>
+                </a:lnTo>
+                <a:lnTo>
+                  <a:pt x="3361334" y="116129"/>
+                </a:lnTo>
+                <a:lnTo>
+                  <a:pt x="3395167" y="113386"/>
+                </a:lnTo>
+                <a:lnTo>
+                  <a:pt x="3429000" y="110642"/>
+                </a:lnTo>
+                <a:lnTo>
+                  <a:pt x="3463747" y="107899"/>
+                </a:lnTo>
+                <a:lnTo>
+                  <a:pt x="3497580" y="105156"/>
+                </a:lnTo>
+                <a:lnTo>
+                  <a:pt x="3531413" y="103327"/>
+                </a:lnTo>
+                <a:lnTo>
+                  <a:pt x="3565246" y="100584"/>
+                </a:lnTo>
+                <a:lnTo>
+                  <a:pt x="3599078" y="97841"/>
+                </a:lnTo>
+                <a:lnTo>
+                  <a:pt x="3632911" y="95098"/>
+                </a:lnTo>
+                <a:lnTo>
+                  <a:pt x="3666744" y="92354"/>
+                </a:lnTo>
+                <a:lnTo>
+                  <a:pt x="3701491" y="89611"/>
+                </a:lnTo>
+                <a:lnTo>
+                  <a:pt x="3735324" y="86868"/>
+                </a:lnTo>
+                <a:lnTo>
+                  <a:pt x="3769157" y="85039"/>
+                </a:lnTo>
+                <a:lnTo>
+                  <a:pt x="3802990" y="82296"/>
+                </a:lnTo>
+                <a:lnTo>
+                  <a:pt x="3836822" y="79553"/>
+                </a:lnTo>
+                <a:lnTo>
+                  <a:pt x="3870655" y="76810"/>
+                </a:lnTo>
+                <a:lnTo>
+                  <a:pt x="3904488" y="74981"/>
+                </a:lnTo>
+                <a:lnTo>
+                  <a:pt x="3938321" y="72238"/>
+                </a:lnTo>
+                <a:lnTo>
+                  <a:pt x="3973068" y="69494"/>
+                </a:lnTo>
+                <a:lnTo>
+                  <a:pt x="4006901" y="67666"/>
+                </a:lnTo>
+                <a:lnTo>
+                  <a:pt x="4040734" y="64922"/>
+                </a:lnTo>
+                <a:lnTo>
+                  <a:pt x="4074566" y="63094"/>
+                </a:lnTo>
+                <a:lnTo>
+                  <a:pt x="4108399" y="60350"/>
+                </a:lnTo>
+                <a:lnTo>
+                  <a:pt x="4142232" y="58522"/>
+                </a:lnTo>
+                <a:lnTo>
+                  <a:pt x="4176065" y="55778"/>
+                </a:lnTo>
+                <a:lnTo>
+                  <a:pt x="4210812" y="53950"/>
+                </a:lnTo>
+                <a:lnTo>
+                  <a:pt x="4244645" y="51206"/>
+                </a:lnTo>
+                <a:lnTo>
+                  <a:pt x="4278478" y="49378"/>
+                </a:lnTo>
+                <a:lnTo>
+                  <a:pt x="4312310" y="46634"/>
+                </a:lnTo>
+                <a:lnTo>
+                  <a:pt x="4346143" y="44806"/>
+                </a:lnTo>
+                <a:lnTo>
+                  <a:pt x="4379976" y="42062"/>
+                </a:lnTo>
+                <a:lnTo>
+                  <a:pt x="4413809" y="40234"/>
+                </a:lnTo>
+                <a:lnTo>
+                  <a:pt x="4447642" y="38405"/>
+                </a:lnTo>
+                <a:lnTo>
+                  <a:pt x="4482389" y="35662"/>
+                </a:lnTo>
+                <a:lnTo>
+                  <a:pt x="4516222" y="33833"/>
+                </a:lnTo>
+                <a:lnTo>
+                  <a:pt x="4550054" y="32004"/>
+                </a:lnTo>
+                <a:lnTo>
+                  <a:pt x="4583887" y="29261"/>
+                </a:lnTo>
+                <a:lnTo>
+                  <a:pt x="4617720" y="27432"/>
+                </a:lnTo>
+                <a:lnTo>
+                  <a:pt x="4651553" y="25603"/>
+                </a:lnTo>
+                <a:lnTo>
+                  <a:pt x="4685386" y="22860"/>
+                </a:lnTo>
+                <a:lnTo>
+                  <a:pt x="4720133" y="21031"/>
+                </a:lnTo>
+                <a:lnTo>
+                  <a:pt x="4753966" y="19202"/>
+                </a:lnTo>
+                <a:lnTo>
+                  <a:pt x="4787798" y="17374"/>
+                </a:lnTo>
+                <a:lnTo>
+                  <a:pt x="4821631" y="15545"/>
                 </a:lnTo>
                 <a:lnTo>
                   <a:pt x="4855464" y="13716"/>
                 </a:lnTo>
                 <a:lnTo>
-                  <a:pt x="4889297" y="11887"/>
-                </a:lnTo>
-                <a:lnTo>
-                  <a:pt x="4923130" y="10058"/>
-                </a:lnTo>
-                <a:lnTo>
-                  <a:pt x="4956962" y="8230"/>
+                  <a:pt x="4889297" y="10973"/>
+                </a:lnTo>
+                <a:lnTo>
+                  <a:pt x="4923130" y="9144"/>
+                </a:lnTo>
+                <a:lnTo>
+                  <a:pt x="4956962" y="7315"/>
                 </a:lnTo>
                 <a:lnTo>
                   <a:pt x="4991710" y="5486"/>
@@ -3181,7 +3181,7 @@
             <a:solidFill>
               <a:srgbClr val="0072B2"/>
             </a:solidFill>
-            <a:prstDash val="solid"/>
+            <a:prstDash val="dash"/>
           </a:ln>
         </p:spPr>
       </p:sp>
@@ -3193,8 +3193,8 @@
         </p:nvSpPr>
         <p:spPr>
           <a:xfrm>
-            <a:off x="1216152" y="3120847"/>
-            <a:ext cx="5093208" cy="1908353"/>
+            <a:off x="1216152" y="3299155"/>
+            <a:ext cx="5093208" cy="1821485"/>
           </a:xfrm>
           <a:custGeom>
             <a:avLst/>
@@ -3203,429 +3203,429 @@
             <a:cxnLst/>
             <a:rect l="l" t="t" r="r" b="b"/>
             <a:pathLst>
-              <a:path w="5093208" h="1908353">
+              <a:path w="5093208" h="1821485">
                 <a:moveTo>
-                  <a:pt x="0" y="1908353"/>
+                  <a:pt x="0" y="1821485"/>
                 </a:moveTo>
                 <a:lnTo>
-                  <a:pt x="33833" y="1536192"/>
-                </a:lnTo>
-                <a:lnTo>
-                  <a:pt x="67666" y="1246327"/>
-                </a:lnTo>
-                <a:lnTo>
-                  <a:pt x="101498" y="1019556"/>
-                </a:lnTo>
-                <a:lnTo>
-                  <a:pt x="136246" y="842162"/>
-                </a:lnTo>
-                <a:lnTo>
-                  <a:pt x="170078" y="703174"/>
-                </a:lnTo>
-                <a:lnTo>
-                  <a:pt x="203911" y="595274"/>
-                </a:lnTo>
-                <a:lnTo>
-                  <a:pt x="237744" y="510235"/>
-                </a:lnTo>
-                <a:lnTo>
-                  <a:pt x="271577" y="443484"/>
-                </a:lnTo>
-                <a:lnTo>
-                  <a:pt x="305410" y="390449"/>
-                </a:lnTo>
-                <a:lnTo>
-                  <a:pt x="339242" y="349301"/>
-                </a:lnTo>
-                <a:lnTo>
-                  <a:pt x="373075" y="316382"/>
-                </a:lnTo>
-                <a:lnTo>
-                  <a:pt x="407822" y="290779"/>
-                </a:lnTo>
-                <a:lnTo>
-                  <a:pt x="441655" y="269748"/>
-                </a:lnTo>
-                <a:lnTo>
-                  <a:pt x="475488" y="253289"/>
-                </a:lnTo>
-                <a:lnTo>
-                  <a:pt x="509321" y="239573"/>
-                </a:lnTo>
-                <a:lnTo>
-                  <a:pt x="543154" y="228600"/>
-                </a:lnTo>
-                <a:lnTo>
-                  <a:pt x="576986" y="218542"/>
-                </a:lnTo>
-                <a:lnTo>
-                  <a:pt x="610819" y="211226"/>
-                </a:lnTo>
-                <a:lnTo>
-                  <a:pt x="645566" y="204826"/>
-                </a:lnTo>
-                <a:lnTo>
-                  <a:pt x="679399" y="199339"/>
-                </a:lnTo>
-                <a:lnTo>
-                  <a:pt x="713232" y="194767"/>
-                </a:lnTo>
-                <a:lnTo>
-                  <a:pt x="747065" y="190195"/>
-                </a:lnTo>
-                <a:lnTo>
-                  <a:pt x="780898" y="186538"/>
-                </a:lnTo>
-                <a:lnTo>
-                  <a:pt x="814730" y="182880"/>
-                </a:lnTo>
-                <a:lnTo>
-                  <a:pt x="848563" y="180137"/>
-                </a:lnTo>
-                <a:lnTo>
-                  <a:pt x="882396" y="177394"/>
-                </a:lnTo>
-                <a:lnTo>
-                  <a:pt x="917143" y="173736"/>
-                </a:lnTo>
-                <a:lnTo>
-                  <a:pt x="950976" y="171907"/>
-                </a:lnTo>
-                <a:lnTo>
-                  <a:pt x="984809" y="169164"/>
-                </a:lnTo>
-                <a:lnTo>
-                  <a:pt x="1018642" y="166421"/>
-                </a:lnTo>
-                <a:lnTo>
-                  <a:pt x="1052474" y="164592"/>
-                </a:lnTo>
-                <a:lnTo>
-                  <a:pt x="1086307" y="161849"/>
-                </a:lnTo>
-                <a:lnTo>
-                  <a:pt x="1120140" y="160020"/>
-                </a:lnTo>
-                <a:lnTo>
-                  <a:pt x="1154887" y="157277"/>
-                </a:lnTo>
-                <a:lnTo>
-                  <a:pt x="1188720" y="155448"/>
-                </a:lnTo>
-                <a:lnTo>
-                  <a:pt x="1222553" y="153619"/>
-                </a:lnTo>
-                <a:lnTo>
-                  <a:pt x="1256386" y="150876"/>
-                </a:lnTo>
-                <a:lnTo>
-                  <a:pt x="1290218" y="149047"/>
-                </a:lnTo>
-                <a:lnTo>
-                  <a:pt x="1324051" y="147218"/>
-                </a:lnTo>
-                <a:lnTo>
-                  <a:pt x="1357884" y="145390"/>
-                </a:lnTo>
-                <a:lnTo>
-                  <a:pt x="1391717" y="142646"/>
-                </a:lnTo>
-                <a:lnTo>
-                  <a:pt x="1426464" y="140818"/>
-                </a:lnTo>
-                <a:lnTo>
-                  <a:pt x="1460297" y="138989"/>
-                </a:lnTo>
-                <a:lnTo>
-                  <a:pt x="1494130" y="137160"/>
-                </a:lnTo>
-                <a:lnTo>
-                  <a:pt x="1527962" y="135331"/>
-                </a:lnTo>
-                <a:lnTo>
-                  <a:pt x="1561795" y="133502"/>
-                </a:lnTo>
-                <a:lnTo>
-                  <a:pt x="1595628" y="131674"/>
-                </a:lnTo>
-                <a:lnTo>
-                  <a:pt x="1629461" y="129845"/>
-                </a:lnTo>
-                <a:lnTo>
-                  <a:pt x="1664208" y="128016"/>
-                </a:lnTo>
-                <a:lnTo>
-                  <a:pt x="1698041" y="126187"/>
-                </a:lnTo>
-                <a:lnTo>
-                  <a:pt x="1731874" y="124358"/>
-                </a:lnTo>
-                <a:lnTo>
-                  <a:pt x="1765706" y="122530"/>
-                </a:lnTo>
-                <a:lnTo>
-                  <a:pt x="1799539" y="120701"/>
-                </a:lnTo>
-                <a:lnTo>
-                  <a:pt x="1833372" y="118872"/>
-                </a:lnTo>
-                <a:lnTo>
-                  <a:pt x="1867205" y="117043"/>
-                </a:lnTo>
-                <a:lnTo>
-                  <a:pt x="1901038" y="115214"/>
-                </a:lnTo>
-                <a:lnTo>
-                  <a:pt x="1935785" y="113386"/>
-                </a:lnTo>
-                <a:lnTo>
-                  <a:pt x="1969618" y="111557"/>
-                </a:lnTo>
-                <a:lnTo>
-                  <a:pt x="2003450" y="109728"/>
-                </a:lnTo>
-                <a:lnTo>
-                  <a:pt x="2037283" y="107899"/>
-                </a:lnTo>
-                <a:lnTo>
-                  <a:pt x="2071116" y="106985"/>
-                </a:lnTo>
-                <a:lnTo>
-                  <a:pt x="2104949" y="105156"/>
-                </a:lnTo>
-                <a:lnTo>
-                  <a:pt x="2138782" y="103327"/>
-                </a:lnTo>
-                <a:lnTo>
-                  <a:pt x="2173529" y="101498"/>
-                </a:lnTo>
-                <a:lnTo>
-                  <a:pt x="2207362" y="99670"/>
-                </a:lnTo>
-                <a:lnTo>
-                  <a:pt x="2241194" y="98755"/>
-                </a:lnTo>
-                <a:lnTo>
-                  <a:pt x="2275027" y="96926"/>
-                </a:lnTo>
-                <a:lnTo>
-                  <a:pt x="2308860" y="95098"/>
-                </a:lnTo>
-                <a:lnTo>
-                  <a:pt x="2342693" y="93269"/>
-                </a:lnTo>
-                <a:lnTo>
-                  <a:pt x="2376526" y="92354"/>
-                </a:lnTo>
-                <a:lnTo>
-                  <a:pt x="2410358" y="90526"/>
-                </a:lnTo>
-                <a:lnTo>
-                  <a:pt x="2445106" y="88697"/>
-                </a:lnTo>
-                <a:lnTo>
-                  <a:pt x="2478938" y="87782"/>
-                </a:lnTo>
-                <a:lnTo>
-                  <a:pt x="2512771" y="85954"/>
-                </a:lnTo>
-                <a:lnTo>
-                  <a:pt x="2546604" y="84125"/>
-                </a:lnTo>
-                <a:lnTo>
-                  <a:pt x="2580437" y="83210"/>
-                </a:lnTo>
-                <a:lnTo>
-                  <a:pt x="2614270" y="81382"/>
-                </a:lnTo>
-                <a:lnTo>
-                  <a:pt x="2648102" y="79553"/>
-                </a:lnTo>
-                <a:lnTo>
-                  <a:pt x="2682850" y="78638"/>
-                </a:lnTo>
-                <a:lnTo>
-                  <a:pt x="2716682" y="76810"/>
-                </a:lnTo>
-                <a:lnTo>
-                  <a:pt x="2750515" y="75895"/>
-                </a:lnTo>
-                <a:lnTo>
-                  <a:pt x="2784348" y="74066"/>
-                </a:lnTo>
-                <a:lnTo>
-                  <a:pt x="2818181" y="73152"/>
-                </a:lnTo>
-                <a:lnTo>
-                  <a:pt x="2852014" y="71323"/>
-                </a:lnTo>
-                <a:lnTo>
-                  <a:pt x="2885846" y="69494"/>
-                </a:lnTo>
-                <a:lnTo>
-                  <a:pt x="2919679" y="68580"/>
-                </a:lnTo>
-                <a:lnTo>
-                  <a:pt x="2954426" y="66751"/>
-                </a:lnTo>
-                <a:lnTo>
-                  <a:pt x="2988259" y="65837"/>
-                </a:lnTo>
-                <a:lnTo>
-                  <a:pt x="3022092" y="64922"/>
-                </a:lnTo>
-                <a:lnTo>
-                  <a:pt x="3055925" y="63094"/>
-                </a:lnTo>
-                <a:lnTo>
-                  <a:pt x="3089758" y="62179"/>
-                </a:lnTo>
-                <a:lnTo>
-                  <a:pt x="3123590" y="60350"/>
-                </a:lnTo>
-                <a:lnTo>
-                  <a:pt x="3157423" y="59436"/>
-                </a:lnTo>
-                <a:lnTo>
-                  <a:pt x="3192170" y="57607"/>
-                </a:lnTo>
-                <a:lnTo>
-                  <a:pt x="3226003" y="56693"/>
-                </a:lnTo>
-                <a:lnTo>
-                  <a:pt x="3259836" y="55778"/>
-                </a:lnTo>
-                <a:lnTo>
-                  <a:pt x="3293669" y="53950"/>
-                </a:lnTo>
-                <a:lnTo>
-                  <a:pt x="3327502" y="53035"/>
-                </a:lnTo>
-                <a:lnTo>
-                  <a:pt x="3361334" y="51206"/>
-                </a:lnTo>
-                <a:lnTo>
-                  <a:pt x="3395167" y="50292"/>
-                </a:lnTo>
-                <a:lnTo>
-                  <a:pt x="3429000" y="49378"/>
-                </a:lnTo>
-                <a:lnTo>
-                  <a:pt x="3463747" y="47549"/>
-                </a:lnTo>
-                <a:lnTo>
-                  <a:pt x="3497580" y="46634"/>
-                </a:lnTo>
-                <a:lnTo>
-                  <a:pt x="3531413" y="45720"/>
-                </a:lnTo>
-                <a:lnTo>
-                  <a:pt x="3565246" y="43891"/>
-                </a:lnTo>
-                <a:lnTo>
-                  <a:pt x="3599078" y="42977"/>
-                </a:lnTo>
-                <a:lnTo>
-                  <a:pt x="3632911" y="42062"/>
-                </a:lnTo>
-                <a:lnTo>
-                  <a:pt x="3666744" y="41148"/>
-                </a:lnTo>
-                <a:lnTo>
-                  <a:pt x="3701491" y="39319"/>
-                </a:lnTo>
-                <a:lnTo>
-                  <a:pt x="3735324" y="38405"/>
-                </a:lnTo>
-                <a:lnTo>
-                  <a:pt x="3769157" y="37490"/>
-                </a:lnTo>
-                <a:lnTo>
-                  <a:pt x="3802990" y="36576"/>
-                </a:lnTo>
-                <a:lnTo>
-                  <a:pt x="3836822" y="34747"/>
-                </a:lnTo>
-                <a:lnTo>
-                  <a:pt x="3870655" y="33833"/>
-                </a:lnTo>
-                <a:lnTo>
-                  <a:pt x="3904488" y="32918"/>
-                </a:lnTo>
-                <a:lnTo>
-                  <a:pt x="3938321" y="32004"/>
-                </a:lnTo>
-                <a:lnTo>
-                  <a:pt x="3973068" y="31090"/>
-                </a:lnTo>
-                <a:lnTo>
-                  <a:pt x="4006901" y="30175"/>
-                </a:lnTo>
-                <a:lnTo>
-                  <a:pt x="4040734" y="28346"/>
-                </a:lnTo>
-                <a:lnTo>
-                  <a:pt x="4074566" y="27432"/>
-                </a:lnTo>
-                <a:lnTo>
-                  <a:pt x="4108399" y="26518"/>
-                </a:lnTo>
-                <a:lnTo>
-                  <a:pt x="4142232" y="25603"/>
-                </a:lnTo>
-                <a:lnTo>
-                  <a:pt x="4176065" y="24689"/>
-                </a:lnTo>
-                <a:lnTo>
-                  <a:pt x="4210812" y="23774"/>
-                </a:lnTo>
-                <a:lnTo>
-                  <a:pt x="4244645" y="22860"/>
-                </a:lnTo>
-                <a:lnTo>
-                  <a:pt x="4278478" y="21031"/>
-                </a:lnTo>
-                <a:lnTo>
-                  <a:pt x="4312310" y="20117"/>
-                </a:lnTo>
-                <a:lnTo>
-                  <a:pt x="4346143" y="19202"/>
-                </a:lnTo>
-                <a:lnTo>
-                  <a:pt x="4379976" y="18288"/>
-                </a:lnTo>
-                <a:lnTo>
-                  <a:pt x="4413809" y="17374"/>
-                </a:lnTo>
-                <a:lnTo>
-                  <a:pt x="4447642" y="16459"/>
-                </a:lnTo>
-                <a:lnTo>
-                  <a:pt x="4482389" y="15545"/>
-                </a:lnTo>
-                <a:lnTo>
-                  <a:pt x="4516222" y="14630"/>
-                </a:lnTo>
-                <a:lnTo>
-                  <a:pt x="4550054" y="13716"/>
-                </a:lnTo>
-                <a:lnTo>
-                  <a:pt x="4583887" y="12802"/>
-                </a:lnTo>
-                <a:lnTo>
-                  <a:pt x="4617720" y="11887"/>
-                </a:lnTo>
-                <a:lnTo>
-                  <a:pt x="4651553" y="10973"/>
-                </a:lnTo>
-                <a:lnTo>
-                  <a:pt x="4685386" y="10058"/>
-                </a:lnTo>
-                <a:lnTo>
-                  <a:pt x="4720133" y="9144"/>
-                </a:lnTo>
-                <a:lnTo>
-                  <a:pt x="4753966" y="8230"/>
+                  <a:pt x="33833" y="1466698"/>
+                </a:lnTo>
+                <a:lnTo>
+                  <a:pt x="67666" y="1189634"/>
+                </a:lnTo>
+                <a:lnTo>
+                  <a:pt x="101498" y="972922"/>
+                </a:lnTo>
+                <a:lnTo>
+                  <a:pt x="136246" y="803758"/>
+                </a:lnTo>
+                <a:lnTo>
+                  <a:pt x="170078" y="671170"/>
+                </a:lnTo>
+                <a:lnTo>
+                  <a:pt x="203911" y="567842"/>
+                </a:lnTo>
+                <a:lnTo>
+                  <a:pt x="237744" y="486461"/>
+                </a:lnTo>
+                <a:lnTo>
+                  <a:pt x="271577" y="423367"/>
+                </a:lnTo>
+                <a:lnTo>
+                  <a:pt x="305410" y="373075"/>
+                </a:lnTo>
+                <a:lnTo>
+                  <a:pt x="339242" y="333756"/>
+                </a:lnTo>
+                <a:lnTo>
+                  <a:pt x="373075" y="301752"/>
+                </a:lnTo>
+                <a:lnTo>
+                  <a:pt x="407822" y="277063"/>
+                </a:lnTo>
+                <a:lnTo>
+                  <a:pt x="441655" y="256946"/>
+                </a:lnTo>
+                <a:lnTo>
+                  <a:pt x="475488" y="241402"/>
+                </a:lnTo>
+                <a:lnTo>
+                  <a:pt x="509321" y="228600"/>
+                </a:lnTo>
+                <a:lnTo>
+                  <a:pt x="543154" y="217627"/>
+                </a:lnTo>
+                <a:lnTo>
+                  <a:pt x="576986" y="208483"/>
+                </a:lnTo>
+                <a:lnTo>
+                  <a:pt x="610819" y="201168"/>
+                </a:lnTo>
+                <a:lnTo>
+                  <a:pt x="645566" y="195682"/>
+                </a:lnTo>
+                <a:lnTo>
+                  <a:pt x="679399" y="190195"/>
+                </a:lnTo>
+                <a:lnTo>
+                  <a:pt x="713232" y="185623"/>
+                </a:lnTo>
+                <a:lnTo>
+                  <a:pt x="747065" y="181966"/>
+                </a:lnTo>
+                <a:lnTo>
+                  <a:pt x="780898" y="178308"/>
+                </a:lnTo>
+                <a:lnTo>
+                  <a:pt x="814730" y="174650"/>
+                </a:lnTo>
+                <a:lnTo>
+                  <a:pt x="848563" y="171907"/>
+                </a:lnTo>
+                <a:lnTo>
+                  <a:pt x="882396" y="169164"/>
+                </a:lnTo>
+                <a:lnTo>
+                  <a:pt x="917143" y="166421"/>
+                </a:lnTo>
+                <a:lnTo>
+                  <a:pt x="950976" y="163678"/>
+                </a:lnTo>
+                <a:lnTo>
+                  <a:pt x="984809" y="160934"/>
+                </a:lnTo>
+                <a:lnTo>
+                  <a:pt x="1018642" y="159106"/>
+                </a:lnTo>
+                <a:lnTo>
+                  <a:pt x="1052474" y="156362"/>
+                </a:lnTo>
+                <a:lnTo>
+                  <a:pt x="1086307" y="154534"/>
+                </a:lnTo>
+                <a:lnTo>
+                  <a:pt x="1120140" y="152705"/>
+                </a:lnTo>
+                <a:lnTo>
+                  <a:pt x="1154887" y="149962"/>
+                </a:lnTo>
+                <a:lnTo>
+                  <a:pt x="1188720" y="148133"/>
+                </a:lnTo>
+                <a:lnTo>
+                  <a:pt x="1222553" y="146304"/>
+                </a:lnTo>
+                <a:lnTo>
+                  <a:pt x="1256386" y="144475"/>
+                </a:lnTo>
+                <a:lnTo>
+                  <a:pt x="1290218" y="142646"/>
+                </a:lnTo>
+                <a:lnTo>
+                  <a:pt x="1324051" y="139903"/>
+                </a:lnTo>
+                <a:lnTo>
+                  <a:pt x="1357884" y="138074"/>
+                </a:lnTo>
+                <a:lnTo>
+                  <a:pt x="1391717" y="136246"/>
+                </a:lnTo>
+                <a:lnTo>
+                  <a:pt x="1426464" y="134417"/>
+                </a:lnTo>
+                <a:lnTo>
+                  <a:pt x="1460297" y="132588"/>
+                </a:lnTo>
+                <a:lnTo>
+                  <a:pt x="1494130" y="130759"/>
+                </a:lnTo>
+                <a:lnTo>
+                  <a:pt x="1527962" y="128930"/>
+                </a:lnTo>
+                <a:lnTo>
+                  <a:pt x="1561795" y="127102"/>
+                </a:lnTo>
+                <a:lnTo>
+                  <a:pt x="1595628" y="125273"/>
+                </a:lnTo>
+                <a:lnTo>
+                  <a:pt x="1629461" y="123444"/>
+                </a:lnTo>
+                <a:lnTo>
+                  <a:pt x="1664208" y="121615"/>
+                </a:lnTo>
+                <a:lnTo>
+                  <a:pt x="1698041" y="119786"/>
+                </a:lnTo>
+                <a:lnTo>
+                  <a:pt x="1731874" y="117958"/>
+                </a:lnTo>
+                <a:lnTo>
+                  <a:pt x="1765706" y="117043"/>
+                </a:lnTo>
+                <a:lnTo>
+                  <a:pt x="1799539" y="115214"/>
+                </a:lnTo>
+                <a:lnTo>
+                  <a:pt x="1833372" y="113386"/>
+                </a:lnTo>
+                <a:lnTo>
+                  <a:pt x="1867205" y="111557"/>
+                </a:lnTo>
+                <a:lnTo>
+                  <a:pt x="1901038" y="109728"/>
+                </a:lnTo>
+                <a:lnTo>
+                  <a:pt x="1935785" y="107899"/>
+                </a:lnTo>
+                <a:lnTo>
+                  <a:pt x="1969618" y="106070"/>
+                </a:lnTo>
+                <a:lnTo>
+                  <a:pt x="2003450" y="105156"/>
+                </a:lnTo>
+                <a:lnTo>
+                  <a:pt x="2037283" y="103327"/>
+                </a:lnTo>
+                <a:lnTo>
+                  <a:pt x="2071116" y="101498"/>
+                </a:lnTo>
+                <a:lnTo>
+                  <a:pt x="2104949" y="99670"/>
+                </a:lnTo>
+                <a:lnTo>
+                  <a:pt x="2138782" y="98755"/>
+                </a:lnTo>
+                <a:lnTo>
+                  <a:pt x="2173529" y="96926"/>
+                </a:lnTo>
+                <a:lnTo>
+                  <a:pt x="2207362" y="95098"/>
+                </a:lnTo>
+                <a:lnTo>
+                  <a:pt x="2241194" y="94183"/>
+                </a:lnTo>
+                <a:lnTo>
+                  <a:pt x="2275027" y="92354"/>
+                </a:lnTo>
+                <a:lnTo>
+                  <a:pt x="2308860" y="90526"/>
+                </a:lnTo>
+                <a:lnTo>
+                  <a:pt x="2342693" y="89611"/>
+                </a:lnTo>
+                <a:lnTo>
+                  <a:pt x="2376526" y="87782"/>
+                </a:lnTo>
+                <a:lnTo>
+                  <a:pt x="2410358" y="85954"/>
+                </a:lnTo>
+                <a:lnTo>
+                  <a:pt x="2445106" y="85039"/>
+                </a:lnTo>
+                <a:lnTo>
+                  <a:pt x="2478938" y="83210"/>
+                </a:lnTo>
+                <a:lnTo>
+                  <a:pt x="2512771" y="81382"/>
+                </a:lnTo>
+                <a:lnTo>
+                  <a:pt x="2546604" y="80467"/>
+                </a:lnTo>
+                <a:lnTo>
+                  <a:pt x="2580437" y="78638"/>
+                </a:lnTo>
+                <a:lnTo>
+                  <a:pt x="2614270" y="77724"/>
+                </a:lnTo>
+                <a:lnTo>
+                  <a:pt x="2648102" y="75895"/>
+                </a:lnTo>
+                <a:lnTo>
+                  <a:pt x="2682850" y="74981"/>
+                </a:lnTo>
+                <a:lnTo>
+                  <a:pt x="2716682" y="73152"/>
+                </a:lnTo>
+                <a:lnTo>
+                  <a:pt x="2750515" y="72238"/>
+                </a:lnTo>
+                <a:lnTo>
+                  <a:pt x="2784348" y="70409"/>
+                </a:lnTo>
+                <a:lnTo>
+                  <a:pt x="2818181" y="69494"/>
+                </a:lnTo>
+                <a:lnTo>
+                  <a:pt x="2852014" y="67666"/>
+                </a:lnTo>
+                <a:lnTo>
+                  <a:pt x="2885846" y="66751"/>
+                </a:lnTo>
+                <a:lnTo>
+                  <a:pt x="2919679" y="64922"/>
+                </a:lnTo>
+                <a:lnTo>
+                  <a:pt x="2954426" y="64008"/>
+                </a:lnTo>
+                <a:lnTo>
+                  <a:pt x="2988259" y="63094"/>
+                </a:lnTo>
+                <a:lnTo>
+                  <a:pt x="3022092" y="61265"/>
+                </a:lnTo>
+                <a:lnTo>
+                  <a:pt x="3055925" y="60350"/>
+                </a:lnTo>
+                <a:lnTo>
+                  <a:pt x="3089758" y="58522"/>
+                </a:lnTo>
+                <a:lnTo>
+                  <a:pt x="3123590" y="57607"/>
+                </a:lnTo>
+                <a:lnTo>
+                  <a:pt x="3157423" y="56693"/>
+                </a:lnTo>
+                <a:lnTo>
+                  <a:pt x="3192170" y="54864"/>
+                </a:lnTo>
+                <a:lnTo>
+                  <a:pt x="3226003" y="53950"/>
+                </a:lnTo>
+                <a:lnTo>
+                  <a:pt x="3259836" y="53035"/>
+                </a:lnTo>
+                <a:lnTo>
+                  <a:pt x="3293669" y="51206"/>
+                </a:lnTo>
+                <a:lnTo>
+                  <a:pt x="3327502" y="50292"/>
+                </a:lnTo>
+                <a:lnTo>
+                  <a:pt x="3361334" y="49378"/>
+                </a:lnTo>
+                <a:lnTo>
+                  <a:pt x="3395167" y="47549"/>
+                </a:lnTo>
+                <a:lnTo>
+                  <a:pt x="3429000" y="46634"/>
+                </a:lnTo>
+                <a:lnTo>
+                  <a:pt x="3463747" y="45720"/>
+                </a:lnTo>
+                <a:lnTo>
+                  <a:pt x="3497580" y="44806"/>
+                </a:lnTo>
+                <a:lnTo>
+                  <a:pt x="3531413" y="42977"/>
+                </a:lnTo>
+                <a:lnTo>
+                  <a:pt x="3565246" y="42062"/>
+                </a:lnTo>
+                <a:lnTo>
+                  <a:pt x="3599078" y="41148"/>
+                </a:lnTo>
+                <a:lnTo>
+                  <a:pt x="3632911" y="40234"/>
+                </a:lnTo>
+                <a:lnTo>
+                  <a:pt x="3666744" y="38405"/>
+                </a:lnTo>
+                <a:lnTo>
+                  <a:pt x="3701491" y="37490"/>
+                </a:lnTo>
+                <a:lnTo>
+                  <a:pt x="3735324" y="36576"/>
+                </a:lnTo>
+                <a:lnTo>
+                  <a:pt x="3769157" y="35662"/>
+                </a:lnTo>
+                <a:lnTo>
+                  <a:pt x="3802990" y="34747"/>
+                </a:lnTo>
+                <a:lnTo>
+                  <a:pt x="3836822" y="33833"/>
+                </a:lnTo>
+                <a:lnTo>
+                  <a:pt x="3870655" y="32004"/>
+                </a:lnTo>
+                <a:lnTo>
+                  <a:pt x="3904488" y="31090"/>
+                </a:lnTo>
+                <a:lnTo>
+                  <a:pt x="3938321" y="30175"/>
+                </a:lnTo>
+                <a:lnTo>
+                  <a:pt x="3973068" y="29261"/>
+                </a:lnTo>
+                <a:lnTo>
+                  <a:pt x="4006901" y="28346"/>
+                </a:lnTo>
+                <a:lnTo>
+                  <a:pt x="4040734" y="27432"/>
+                </a:lnTo>
+                <a:lnTo>
+                  <a:pt x="4074566" y="26518"/>
+                </a:lnTo>
+                <a:lnTo>
+                  <a:pt x="4108399" y="25603"/>
+                </a:lnTo>
+                <a:lnTo>
+                  <a:pt x="4142232" y="24689"/>
+                </a:lnTo>
+                <a:lnTo>
+                  <a:pt x="4176065" y="22860"/>
+                </a:lnTo>
+                <a:lnTo>
+                  <a:pt x="4210812" y="21946"/>
+                </a:lnTo>
+                <a:lnTo>
+                  <a:pt x="4244645" y="21031"/>
+                </a:lnTo>
+                <a:lnTo>
+                  <a:pt x="4278478" y="20117"/>
+                </a:lnTo>
+                <a:lnTo>
+                  <a:pt x="4312310" y="19202"/>
+                </a:lnTo>
+                <a:lnTo>
+                  <a:pt x="4346143" y="18288"/>
+                </a:lnTo>
+                <a:lnTo>
+                  <a:pt x="4379976" y="17374"/>
+                </a:lnTo>
+                <a:lnTo>
+                  <a:pt x="4413809" y="16459"/>
+                </a:lnTo>
+                <a:lnTo>
+                  <a:pt x="4447642" y="15545"/>
+                </a:lnTo>
+                <a:lnTo>
+                  <a:pt x="4482389" y="14630"/>
+                </a:lnTo>
+                <a:lnTo>
+                  <a:pt x="4516222" y="13716"/>
+                </a:lnTo>
+                <a:lnTo>
+                  <a:pt x="4550054" y="12802"/>
+                </a:lnTo>
+                <a:lnTo>
+                  <a:pt x="4583887" y="11887"/>
+                </a:lnTo>
+                <a:lnTo>
+                  <a:pt x="4617720" y="10973"/>
+                </a:lnTo>
+                <a:lnTo>
+                  <a:pt x="4651553" y="10058"/>
+                </a:lnTo>
+                <a:lnTo>
+                  <a:pt x="4685386" y="9144"/>
+                </a:lnTo>
+                <a:lnTo>
+                  <a:pt x="4720133" y="8230"/>
+                </a:lnTo>
+                <a:lnTo>
+                  <a:pt x="4753966" y="7315"/>
                 </a:lnTo>
                 <a:lnTo>
                   <a:pt x="4787798" y="7315"/>
@@ -3652,7 +3652,7 @@
                   <a:pt x="5025542" y="914"/>
                 </a:lnTo>
                 <a:lnTo>
-                  <a:pt x="5059375" y="914"/>
+                  <a:pt x="5059375" y="0"/>
                 </a:lnTo>
                 <a:lnTo>
                   <a:pt x="5093208" y="0"/>
@@ -3677,7 +3677,7 @@
         </p:nvSpPr>
         <p:spPr>
           <a:xfrm>
-            <a:off x="713232" y="2807208"/>
+            <a:off x="713232" y="2990088"/>
             <a:ext cx="365760" cy="420624"/>
           </a:xfrm>
           <a:prstGeom prst="rect">
@@ -3716,7 +3716,7 @@
         </p:nvSpPr>
         <p:spPr>
           <a:xfrm>
-            <a:off x="713232" y="4818888"/>
+            <a:off x="713232" y="4910328"/>
             <a:ext cx="365760" cy="420624"/>
           </a:xfrm>
           <a:prstGeom prst="rect">
@@ -3755,7 +3755,7 @@
         </p:nvSpPr>
         <p:spPr>
           <a:xfrm>
-            <a:off x="502920" y="1755648"/>
+            <a:off x="502920" y="2331720"/>
             <a:ext cx="3200400" cy="420624"/>
           </a:xfrm>
           <a:prstGeom prst="rect">
@@ -3794,7 +3794,7 @@
         </p:nvSpPr>
         <p:spPr>
           <a:xfrm>
-            <a:off x="5440680" y="5184648"/>
+            <a:off x="5440680" y="5276088"/>
             <a:ext cx="1097280" cy="420624"/>
           </a:xfrm>
           <a:prstGeom prst="rect">
@@ -3833,8 +3833,8 @@
         </p:nvSpPr>
         <p:spPr>
           <a:xfrm>
-            <a:off x="3977640" y="1965960"/>
-            <a:ext cx="502920" cy="9144"/>
+            <a:off x="1188720" y="1901952"/>
+            <a:ext cx="548640" cy="9144"/>
           </a:xfrm>
           <a:custGeom>
             <a:avLst/>
@@ -3843,12 +3843,12 @@
             <a:cxnLst/>
             <a:rect l="l" t="t" r="r" b="b"/>
             <a:pathLst>
-              <a:path w="502920" h="9144">
+              <a:path w="548640" h="9144">
                 <a:moveTo>
                   <a:pt x="0" y="0"/>
                 </a:moveTo>
                 <a:lnTo>
-                  <a:pt x="502920" y="0"/>
+                  <a:pt x="548640" y="0"/>
                 </a:lnTo>
               </a:path>
             </a:pathLst>
@@ -3870,8 +3870,8 @@
         </p:nvSpPr>
         <p:spPr>
           <a:xfrm>
-            <a:off x="4617720" y="1755648"/>
-            <a:ext cx="2103120" cy="420624"/>
+            <a:off x="1874520" y="1691640"/>
+            <a:ext cx="1920240" cy="420624"/>
           </a:xfrm>
           <a:prstGeom prst="rect">
             <a:avLst/>
@@ -3909,8 +3909,8 @@
         </p:nvSpPr>
         <p:spPr>
           <a:xfrm>
-            <a:off x="3977640" y="2478024"/>
-            <a:ext cx="502920" cy="9144"/>
+            <a:off x="4160520" y="1901952"/>
+            <a:ext cx="548640" cy="9144"/>
           </a:xfrm>
           <a:custGeom>
             <a:avLst/>
@@ -3919,12 +3919,12 @@
             <a:cxnLst/>
             <a:rect l="l" t="t" r="r" b="b"/>
             <a:pathLst>
-              <a:path w="502920" h="9144">
+              <a:path w="548640" h="9144">
                 <a:moveTo>
                   <a:pt x="0" y="0"/>
                 </a:moveTo>
                 <a:lnTo>
-                  <a:pt x="502920" y="0"/>
+                  <a:pt x="548640" y="0"/>
                 </a:lnTo>
               </a:path>
             </a:pathLst>
@@ -3934,7 +3934,7 @@
             <a:solidFill>
               <a:srgbClr val="0072B2"/>
             </a:solidFill>
-            <a:prstDash val="solid"/>
+            <a:prstDash val="dash"/>
           </a:ln>
         </p:spPr>
       </p:sp>
@@ -3946,8 +3946,8 @@
         </p:nvSpPr>
         <p:spPr>
           <a:xfrm>
-            <a:off x="4617720" y="2267712"/>
-            <a:ext cx="2103120" cy="420624"/>
+            <a:off x="4846320" y="1691640"/>
+            <a:ext cx="1920240" cy="420624"/>
           </a:xfrm>
           <a:prstGeom prst="rect">
             <a:avLst/>
@@ -3985,7 +3985,7 @@
         </p:nvSpPr>
         <p:spPr>
           <a:xfrm>
-            <a:off x="7040880" y="2034540"/>
+            <a:off x="7040880" y="2048256"/>
             <a:ext cx="347472" cy="420624"/>
           </a:xfrm>
           <a:prstGeom prst="rect">
@@ -4024,7 +4024,7 @@
         </p:nvSpPr>
         <p:spPr>
           <a:xfrm>
-            <a:off x="7388352" y="2034540"/>
+            <a:off x="7388352" y="2048256"/>
             <a:ext cx="4297680" cy="841248"/>
           </a:xfrm>
           <a:prstGeom prst="rect">
@@ -4080,7 +4080,7 @@
         </p:nvSpPr>
         <p:spPr>
           <a:xfrm>
-            <a:off x="7040880" y="3259836"/>
+            <a:off x="7040880" y="3273552"/>
             <a:ext cx="347472" cy="420624"/>
           </a:xfrm>
           <a:prstGeom prst="rect">
@@ -4119,7 +4119,7 @@
         </p:nvSpPr>
         <p:spPr>
           <a:xfrm>
-            <a:off x="7388352" y="3259836"/>
+            <a:off x="7388352" y="3273552"/>
             <a:ext cx="4297680" cy="841248"/>
           </a:xfrm>
           <a:prstGeom prst="rect">
@@ -4197,7 +4197,7 @@
         </p:nvSpPr>
         <p:spPr>
           <a:xfrm>
-            <a:off x="7040880" y="4485132"/>
+            <a:off x="7040880" y="4498848"/>
             <a:ext cx="347472" cy="420624"/>
           </a:xfrm>
           <a:prstGeom prst="rect">
@@ -4236,7 +4236,7 @@
         </p:nvSpPr>
         <p:spPr>
           <a:xfrm>
-            <a:off x="7388352" y="4485132"/>
+            <a:off x="7388352" y="4498848"/>
             <a:ext cx="4297680" cy="841248"/>
           </a:xfrm>
           <a:prstGeom prst="rect">
@@ -4402,7 +4402,7 @@
           <a:ln/>
         </p:spPr>
         <p:txBody>
-          <a:bodyPr wrap="square" lIns="0" tIns="0" rIns="0" bIns="0" rtlCol="0" anchor="ctr"/>
+          <a:bodyPr wrap="none" lIns="0" tIns="0" rIns="0" bIns="0" rtlCol="0" anchor="ctr"/>
           <a:lstStyle/>
           <a:p>
             <a:pPr algn="ctr" indent="0" marL="0">
@@ -4445,7 +4445,7 @@
           <a:ln/>
         </p:spPr>
         <p:txBody>
-          <a:bodyPr wrap="square" lIns="0" tIns="0" rIns="0" bIns="0" rtlCol="0" anchor="ctr"/>
+          <a:bodyPr wrap="none" lIns="0" tIns="0" rIns="0" bIns="0" rtlCol="0" anchor="ctr"/>
           <a:lstStyle/>
           <a:p>
             <a:pPr algn="ctr" indent="0" marL="0">
@@ -4488,7 +4488,7 @@
           <a:ln/>
         </p:spPr>
         <p:txBody>
-          <a:bodyPr wrap="square" lIns="0" tIns="0" rIns="0" bIns="0" rtlCol="0" anchor="ctr"/>
+          <a:bodyPr wrap="none" lIns="0" tIns="0" rIns="0" bIns="0" rtlCol="0" anchor="ctr"/>
           <a:lstStyle/>
           <a:p>
             <a:pPr algn="ctr" indent="0" marL="0">
@@ -4548,7 +4548,7 @@
           <a:ln/>
         </p:spPr>
         <p:txBody>
-          <a:bodyPr wrap="square" lIns="0" tIns="0" rIns="0" bIns="0" rtlCol="0" anchor="ctr"/>
+          <a:bodyPr wrap="none" lIns="0" tIns="0" rIns="0" bIns="0" rtlCol="0" anchor="ctr"/>
           <a:lstStyle/>
           <a:p>
             <a:pPr algn="ctr" indent="0" marL="0">
@@ -4608,7 +4608,7 @@
           <a:ln/>
         </p:spPr>
         <p:txBody>
-          <a:bodyPr wrap="square" lIns="0" tIns="0" rIns="0" bIns="0" rtlCol="0" anchor="ctr"/>
+          <a:bodyPr wrap="none" lIns="0" tIns="0" rIns="0" bIns="0" rtlCol="0" anchor="ctr"/>
           <a:lstStyle/>
           <a:p>
             <a:pPr algn="ctr" indent="0" marL="0">
@@ -5845,7 +5845,7 @@
           <a:ln/>
         </p:spPr>
         <p:txBody>
-          <a:bodyPr wrap="square" lIns="0" tIns="0" rIns="0" bIns="0" rtlCol="0" anchor="ctr"/>
+          <a:bodyPr wrap="none" lIns="0" tIns="0" rIns="0" bIns="0" rtlCol="0" anchor="ctr"/>
           <a:lstStyle/>
           <a:p>
             <a:pPr algn="ctr" indent="0" marL="0">
@@ -5888,7 +5888,7 @@
           <a:ln/>
         </p:spPr>
         <p:txBody>
-          <a:bodyPr wrap="square" lIns="0" tIns="0" rIns="0" bIns="0" rtlCol="0" anchor="ctr"/>
+          <a:bodyPr wrap="none" lIns="0" tIns="0" rIns="0" bIns="0" rtlCol="0" anchor="ctr"/>
           <a:lstStyle/>
           <a:p>
             <a:pPr algn="ctr" indent="0" marL="0">
@@ -5931,7 +5931,7 @@
           <a:ln/>
         </p:spPr>
         <p:txBody>
-          <a:bodyPr wrap="square" lIns="0" tIns="0" rIns="0" bIns="0" rtlCol="0" anchor="ctr"/>
+          <a:bodyPr wrap="none" lIns="0" tIns="0" rIns="0" bIns="0" rtlCol="0" anchor="ctr"/>
           <a:lstStyle/>
           <a:p>
             <a:pPr algn="ctr" indent="0" marL="0">
@@ -5991,7 +5991,7 @@
           <a:ln/>
         </p:spPr>
         <p:txBody>
-          <a:bodyPr wrap="square" lIns="0" tIns="0" rIns="0" bIns="0" rtlCol="0" anchor="ctr"/>
+          <a:bodyPr wrap="none" lIns="0" tIns="0" rIns="0" bIns="0" rtlCol="0" anchor="ctr"/>
           <a:lstStyle/>
           <a:p>
             <a:pPr algn="ctr" indent="0" marL="0">
@@ -6051,7 +6051,7 @@
           <a:ln/>
         </p:spPr>
         <p:txBody>
-          <a:bodyPr wrap="square" lIns="0" tIns="0" rIns="0" bIns="0" rtlCol="0" anchor="ctr"/>
+          <a:bodyPr wrap="none" lIns="0" tIns="0" rIns="0" bIns="0" rtlCol="0" anchor="ctr"/>
           <a:lstStyle/>
           <a:p>
             <a:pPr algn="ctr" indent="0" marL="0">
@@ -6176,11 +6176,11 @@
         <p:spPr>
           <a:xfrm>
             <a:off x="502920" y="1691640"/>
-            <a:ext cx="3499409" cy="4032504"/>
+            <a:ext cx="3339389" cy="4032504"/>
           </a:xfrm>
           <a:prstGeom prst="roundRect">
             <a:avLst>
-              <a:gd name="adj" fmla="val 2090"/>
+              <a:gd name="adj" fmla="val 2191"/>
             </a:avLst>
           </a:prstGeom>
           <a:solidFill>
@@ -6198,7 +6198,7 @@
         <p:spPr>
           <a:xfrm>
             <a:off x="630936" y="1837944"/>
-            <a:ext cx="3243377" cy="502920"/>
+            <a:ext cx="3083357" cy="502920"/>
           </a:xfrm>
           <a:prstGeom prst="rect">
             <a:avLst/>
@@ -6237,7 +6237,7 @@
         <p:spPr>
           <a:xfrm>
             <a:off x="630936" y="2468880"/>
-            <a:ext cx="3243377" cy="457200"/>
+            <a:ext cx="3083357" cy="457200"/>
           </a:xfrm>
           <a:prstGeom prst="rect">
             <a:avLst/>
@@ -6276,7 +6276,7 @@
         <p:spPr>
           <a:xfrm>
             <a:off x="630936" y="3218688"/>
-            <a:ext cx="3243377" cy="457200"/>
+            <a:ext cx="3083357" cy="457200"/>
           </a:xfrm>
           <a:prstGeom prst="rect">
             <a:avLst/>
@@ -6315,7 +6315,7 @@
         <p:spPr>
           <a:xfrm>
             <a:off x="905256" y="3675888"/>
-            <a:ext cx="2969057" cy="457200"/>
+            <a:ext cx="2809037" cy="457200"/>
           </a:xfrm>
           <a:prstGeom prst="rect">
             <a:avLst/>
@@ -6354,7 +6354,7 @@
         <p:spPr>
           <a:xfrm>
             <a:off x="630936" y="4425696"/>
-            <a:ext cx="3243377" cy="457200"/>
+            <a:ext cx="3083357" cy="457200"/>
           </a:xfrm>
           <a:prstGeom prst="rect">
             <a:avLst/>
@@ -6392,12 +6392,12 @@
         </p:nvSpPr>
         <p:spPr>
           <a:xfrm>
-            <a:off x="4221785" y="1691640"/>
-            <a:ext cx="3745382" cy="4032504"/>
+            <a:off x="4061765" y="1691640"/>
+            <a:ext cx="4065422" cy="4032504"/>
           </a:xfrm>
           <a:prstGeom prst="roundRect">
             <a:avLst>
-              <a:gd name="adj" fmla="val 1953"/>
+              <a:gd name="adj" fmla="val 1814"/>
             </a:avLst>
           </a:prstGeom>
           <a:solidFill>
@@ -6414,8 +6414,8 @@
         </p:nvSpPr>
         <p:spPr>
           <a:xfrm>
-            <a:off x="4349801" y="1837944"/>
-            <a:ext cx="3489350" cy="502920"/>
+            <a:off x="4189781" y="1837944"/>
+            <a:ext cx="3809390" cy="502920"/>
           </a:xfrm>
           <a:prstGeom prst="rect">
             <a:avLst/>
@@ -6453,8 +6453,8 @@
         </p:nvSpPr>
         <p:spPr>
           <a:xfrm>
-            <a:off x="4349801" y="2468880"/>
-            <a:ext cx="3489350" cy="457200"/>
+            <a:off x="4189781" y="2468880"/>
+            <a:ext cx="3809390" cy="457200"/>
           </a:xfrm>
           <a:prstGeom prst="rect">
             <a:avLst/>
@@ -6503,8 +6503,8 @@
         </p:nvSpPr>
         <p:spPr>
           <a:xfrm>
-            <a:off x="4349801" y="3218688"/>
-            <a:ext cx="3489350" cy="457200"/>
+            <a:off x="4189781" y="3218688"/>
+            <a:ext cx="3809390" cy="457200"/>
           </a:xfrm>
           <a:prstGeom prst="rect">
             <a:avLst/>
@@ -6553,8 +6553,8 @@
         </p:nvSpPr>
         <p:spPr>
           <a:xfrm>
-            <a:off x="4624121" y="3675888"/>
-            <a:ext cx="3215030" cy="457200"/>
+            <a:off x="4464101" y="3675888"/>
+            <a:ext cx="3535070" cy="457200"/>
           </a:xfrm>
           <a:prstGeom prst="rect">
             <a:avLst/>
@@ -6592,12 +6592,12 @@
         </p:nvSpPr>
         <p:spPr>
           <a:xfrm>
-            <a:off x="8186623" y="1691640"/>
-            <a:ext cx="3499409" cy="4032504"/>
+            <a:off x="8346643" y="1691640"/>
+            <a:ext cx="3339389" cy="4032504"/>
           </a:xfrm>
           <a:prstGeom prst="roundRect">
             <a:avLst>
-              <a:gd name="adj" fmla="val 2090"/>
+              <a:gd name="adj" fmla="val 2191"/>
             </a:avLst>
           </a:prstGeom>
           <a:solidFill>
@@ -6614,8 +6614,8 @@
         </p:nvSpPr>
         <p:spPr>
           <a:xfrm>
-            <a:off x="8314639" y="1837944"/>
-            <a:ext cx="3243377" cy="502920"/>
+            <a:off x="8474659" y="1837944"/>
+            <a:ext cx="3083357" cy="502920"/>
           </a:xfrm>
           <a:prstGeom prst="rect">
             <a:avLst/>
@@ -6653,8 +6653,8 @@
         </p:nvSpPr>
         <p:spPr>
           <a:xfrm>
-            <a:off x="8314639" y="2468880"/>
-            <a:ext cx="3243377" cy="457200"/>
+            <a:off x="8474659" y="2468880"/>
+            <a:ext cx="3083357" cy="457200"/>
           </a:xfrm>
           <a:prstGeom prst="rect">
             <a:avLst/>
@@ -6703,8 +6703,8 @@
         </p:nvSpPr>
         <p:spPr>
           <a:xfrm>
-            <a:off x="8314639" y="3047695"/>
-            <a:ext cx="3243377" cy="457200"/>
+            <a:off x="8474659" y="3047695"/>
+            <a:ext cx="3083357" cy="457200"/>
           </a:xfrm>
           <a:prstGeom prst="rect">
             <a:avLst/>
@@ -6742,8 +6742,8 @@
         </p:nvSpPr>
         <p:spPr>
           <a:xfrm>
-            <a:off x="8314639" y="3627425"/>
-            <a:ext cx="3243377" cy="457200"/>
+            <a:off x="8474659" y="3627425"/>
+            <a:ext cx="3083357" cy="457200"/>
           </a:xfrm>
           <a:prstGeom prst="rect">
             <a:avLst/>
@@ -6781,8 +6781,8 @@
         </p:nvSpPr>
         <p:spPr>
           <a:xfrm>
-            <a:off x="8588959" y="4084625"/>
-            <a:ext cx="2969057" cy="457200"/>
+            <a:off x="8748979" y="4084625"/>
+            <a:ext cx="2809037" cy="457200"/>
           </a:xfrm>
           <a:prstGeom prst="rect">
             <a:avLst/>
@@ -6820,8 +6820,8 @@
         </p:nvSpPr>
         <p:spPr>
           <a:xfrm>
-            <a:off x="8314639" y="4663440"/>
-            <a:ext cx="3243377" cy="457200"/>
+            <a:off x="8474659" y="4663440"/>
+            <a:ext cx="3083357" cy="457200"/>
           </a:xfrm>
           <a:prstGeom prst="rect">
             <a:avLst/>
@@ -6859,8 +6859,8 @@
         </p:nvSpPr>
         <p:spPr>
           <a:xfrm>
-            <a:off x="8588959" y="5120640"/>
-            <a:ext cx="2969057" cy="457200"/>
+            <a:off x="8748979" y="5120640"/>
+            <a:ext cx="2809037" cy="457200"/>
           </a:xfrm>
           <a:prstGeom prst="rect">
             <a:avLst/>
@@ -7008,7 +7008,7 @@
           <a:ln/>
         </p:spPr>
         <p:txBody>
-          <a:bodyPr wrap="square" lIns="0" tIns="0" rIns="0" bIns="0" rtlCol="0" anchor="ctr"/>
+          <a:bodyPr wrap="none" lIns="0" tIns="0" rIns="0" bIns="0" rtlCol="0" anchor="ctr"/>
           <a:lstStyle/>
           <a:p>
             <a:pPr algn="ctr" indent="0" marL="0">
@@ -7051,7 +7051,7 @@
           <a:ln/>
         </p:spPr>
         <p:txBody>
-          <a:bodyPr wrap="square" lIns="0" tIns="0" rIns="0" bIns="0" rtlCol="0" anchor="ctr"/>
+          <a:bodyPr wrap="none" lIns="0" tIns="0" rIns="0" bIns="0" rtlCol="0" anchor="ctr"/>
           <a:lstStyle/>
           <a:p>
             <a:pPr algn="ctr" indent="0" marL="0">
@@ -7094,7 +7094,7 @@
           <a:ln/>
         </p:spPr>
         <p:txBody>
-          <a:bodyPr wrap="square" lIns="0" tIns="0" rIns="0" bIns="0" rtlCol="0" anchor="ctr"/>
+          <a:bodyPr wrap="none" lIns="0" tIns="0" rIns="0" bIns="0" rtlCol="0" anchor="ctr"/>
           <a:lstStyle/>
           <a:p>
             <a:pPr algn="ctr" indent="0" marL="0">
@@ -7154,7 +7154,7 @@
           <a:ln/>
         </p:spPr>
         <p:txBody>
-          <a:bodyPr wrap="square" lIns="0" tIns="0" rIns="0" bIns="0" rtlCol="0" anchor="ctr"/>
+          <a:bodyPr wrap="none" lIns="0" tIns="0" rIns="0" bIns="0" rtlCol="0" anchor="ctr"/>
           <a:lstStyle/>
           <a:p>
             <a:pPr algn="ctr" indent="0" marL="0">
@@ -7214,7 +7214,7 @@
           <a:ln/>
         </p:spPr>
         <p:txBody>
-          <a:bodyPr wrap="square" lIns="0" tIns="0" rIns="0" bIns="0" rtlCol="0" anchor="ctr"/>
+          <a:bodyPr wrap="none" lIns="0" tIns="0" rIns="0" bIns="0" rtlCol="0" anchor="ctr"/>
           <a:lstStyle/>
           <a:p>
             <a:pPr algn="ctr" indent="0" marL="0">
@@ -7339,11 +7339,11 @@
         <p:spPr>
           <a:xfrm>
             <a:off x="502920" y="1691640"/>
-            <a:ext cx="3581705" cy="4032504"/>
+            <a:ext cx="3633826" cy="4032504"/>
           </a:xfrm>
           <a:prstGeom prst="roundRect">
             <a:avLst>
-              <a:gd name="adj" fmla="val 2042"/>
+              <a:gd name="adj" fmla="val 2013"/>
             </a:avLst>
           </a:prstGeom>
           <a:solidFill>
@@ -7361,7 +7361,7 @@
         <p:spPr>
           <a:xfrm>
             <a:off x="630936" y="1837944"/>
-            <a:ext cx="3325673" cy="502920"/>
+            <a:ext cx="3377794" cy="502920"/>
           </a:xfrm>
           <a:prstGeom prst="rect">
             <a:avLst/>
@@ -7400,7 +7400,7 @@
         <p:spPr>
           <a:xfrm>
             <a:off x="630936" y="2468880"/>
-            <a:ext cx="3325673" cy="457200"/>
+            <a:ext cx="3377794" cy="457200"/>
           </a:xfrm>
           <a:prstGeom prst="rect">
             <a:avLst/>
@@ -7439,7 +7439,7 @@
         <p:spPr>
           <a:xfrm>
             <a:off x="905256" y="2926080"/>
-            <a:ext cx="3051353" cy="457200"/>
+            <a:ext cx="3103474" cy="457200"/>
           </a:xfrm>
           <a:prstGeom prst="rect">
             <a:avLst/>
@@ -7489,7 +7489,7 @@
         <p:spPr>
           <a:xfrm>
             <a:off x="630936" y="3675888"/>
-            <a:ext cx="3325673" cy="457200"/>
+            <a:ext cx="3377794" cy="457200"/>
           </a:xfrm>
           <a:prstGeom prst="rect">
             <a:avLst/>
@@ -7528,7 +7528,7 @@
         <p:spPr>
           <a:xfrm>
             <a:off x="905256" y="4133088"/>
-            <a:ext cx="3051353" cy="457200"/>
+            <a:ext cx="3103474" cy="457200"/>
           </a:xfrm>
           <a:prstGeom prst="rect">
             <a:avLst/>
@@ -7567,7 +7567,7 @@
         <p:spPr>
           <a:xfrm>
             <a:off x="630936" y="4882896"/>
-            <a:ext cx="3325673" cy="457200"/>
+            <a:ext cx="3377794" cy="457200"/>
           </a:xfrm>
           <a:prstGeom prst="rect">
             <a:avLst/>
@@ -7605,12 +7605,12 @@
         </p:nvSpPr>
         <p:spPr>
           <a:xfrm>
-            <a:off x="4304081" y="1691640"/>
-            <a:ext cx="3581705" cy="4032504"/>
+            <a:off x="4356202" y="1691640"/>
+            <a:ext cx="3818534" cy="4032504"/>
           </a:xfrm>
           <a:prstGeom prst="roundRect">
             <a:avLst>
-              <a:gd name="adj" fmla="val 2042"/>
+              <a:gd name="adj" fmla="val 1916"/>
             </a:avLst>
           </a:prstGeom>
           <a:solidFill>
@@ -7627,8 +7627,8 @@
         </p:nvSpPr>
         <p:spPr>
           <a:xfrm>
-            <a:off x="4432097" y="1837944"/>
-            <a:ext cx="3325673" cy="502920"/>
+            <a:off x="4484218" y="1837944"/>
+            <a:ext cx="3562502" cy="502920"/>
           </a:xfrm>
           <a:prstGeom prst="rect">
             <a:avLst/>
@@ -7666,8 +7666,8 @@
         </p:nvSpPr>
         <p:spPr>
           <a:xfrm>
-            <a:off x="4432097" y="2468880"/>
-            <a:ext cx="3325673" cy="457200"/>
+            <a:off x="4484218" y="2468880"/>
+            <a:ext cx="3562502" cy="457200"/>
           </a:xfrm>
           <a:prstGeom prst="rect">
             <a:avLst/>
@@ -7727,8 +7727,8 @@
         </p:nvSpPr>
         <p:spPr>
           <a:xfrm>
-            <a:off x="4706417" y="2926080"/>
-            <a:ext cx="3051353" cy="457200"/>
+            <a:off x="4758538" y="2926080"/>
+            <a:ext cx="3288182" cy="457200"/>
           </a:xfrm>
           <a:prstGeom prst="rect">
             <a:avLst/>
@@ -7777,8 +7777,8 @@
         </p:nvSpPr>
         <p:spPr>
           <a:xfrm>
-            <a:off x="4432097" y="3675888"/>
-            <a:ext cx="3325673" cy="457200"/>
+            <a:off x="4484218" y="3675888"/>
+            <a:ext cx="3562502" cy="457200"/>
           </a:xfrm>
           <a:prstGeom prst="rect">
             <a:avLst/>
@@ -7816,12 +7816,12 @@
         </p:nvSpPr>
         <p:spPr>
           <a:xfrm>
-            <a:off x="8104327" y="1691640"/>
-            <a:ext cx="3581705" cy="4032504"/>
+            <a:off x="8393278" y="1691640"/>
+            <a:ext cx="3292754" cy="4032504"/>
           </a:xfrm>
           <a:prstGeom prst="roundRect">
             <a:avLst>
-              <a:gd name="adj" fmla="val 2042"/>
+              <a:gd name="adj" fmla="val 2222"/>
             </a:avLst>
           </a:prstGeom>
           <a:solidFill>
@@ -7838,8 +7838,8 @@
         </p:nvSpPr>
         <p:spPr>
           <a:xfrm>
-            <a:off x="8232343" y="1837944"/>
-            <a:ext cx="3325673" cy="502920"/>
+            <a:off x="8521294" y="1837944"/>
+            <a:ext cx="3036722" cy="502920"/>
           </a:xfrm>
           <a:prstGeom prst="rect">
             <a:avLst/>
@@ -7877,8 +7877,8 @@
         </p:nvSpPr>
         <p:spPr>
           <a:xfrm>
-            <a:off x="8232343" y="2468880"/>
-            <a:ext cx="3325673" cy="457200"/>
+            <a:off x="8521294" y="2468880"/>
+            <a:ext cx="3036722" cy="457200"/>
           </a:xfrm>
           <a:prstGeom prst="rect">
             <a:avLst/>
@@ -7916,8 +7916,8 @@
         </p:nvSpPr>
         <p:spPr>
           <a:xfrm>
-            <a:off x="8506663" y="2926080"/>
-            <a:ext cx="3051353" cy="457200"/>
+            <a:off x="8795614" y="2926080"/>
+            <a:ext cx="2762402" cy="457200"/>
           </a:xfrm>
           <a:prstGeom prst="rect">
             <a:avLst/>
@@ -7955,8 +7955,8 @@
         </p:nvSpPr>
         <p:spPr>
           <a:xfrm>
-            <a:off x="8232343" y="3504895"/>
-            <a:ext cx="3325673" cy="457200"/>
+            <a:off x="8521294" y="3504895"/>
+            <a:ext cx="3036722" cy="457200"/>
           </a:xfrm>
           <a:prstGeom prst="rect">
             <a:avLst/>
@@ -7994,8 +7994,8 @@
         </p:nvSpPr>
         <p:spPr>
           <a:xfrm>
-            <a:off x="8506663" y="3962095"/>
-            <a:ext cx="3051353" cy="457200"/>
+            <a:off x="8795614" y="3962095"/>
+            <a:ext cx="2762402" cy="457200"/>
           </a:xfrm>
           <a:prstGeom prst="rect">
             <a:avLst/>
@@ -8033,8 +8033,8 @@
         </p:nvSpPr>
         <p:spPr>
           <a:xfrm>
-            <a:off x="8232343" y="4541825"/>
-            <a:ext cx="3325673" cy="457200"/>
+            <a:off x="8521294" y="4541825"/>
+            <a:ext cx="3036722" cy="457200"/>
           </a:xfrm>
           <a:prstGeom prst="rect">
             <a:avLst/>
@@ -8072,8 +8072,8 @@
         </p:nvSpPr>
         <p:spPr>
           <a:xfrm>
-            <a:off x="8232343" y="5120640"/>
-            <a:ext cx="3325673" cy="457200"/>
+            <a:off x="8521294" y="5120640"/>
+            <a:ext cx="3036722" cy="457200"/>
           </a:xfrm>
           <a:prstGeom prst="rect">
             <a:avLst/>
@@ -8221,7 +8221,7 @@
           <a:ln/>
         </p:spPr>
         <p:txBody>
-          <a:bodyPr wrap="square" lIns="0" tIns="0" rIns="0" bIns="0" rtlCol="0" anchor="ctr"/>
+          <a:bodyPr wrap="none" lIns="0" tIns="0" rIns="0" bIns="0" rtlCol="0" anchor="ctr"/>
           <a:lstStyle/>
           <a:p>
             <a:pPr algn="ctr" indent="0" marL="0">
@@ -8264,7 +8264,7 @@
           <a:ln/>
         </p:spPr>
         <p:txBody>
-          <a:bodyPr wrap="square" lIns="0" tIns="0" rIns="0" bIns="0" rtlCol="0" anchor="ctr"/>
+          <a:bodyPr wrap="none" lIns="0" tIns="0" rIns="0" bIns="0" rtlCol="0" anchor="ctr"/>
           <a:lstStyle/>
           <a:p>
             <a:pPr algn="ctr" indent="0" marL="0">
@@ -8307,7 +8307,7 @@
           <a:ln/>
         </p:spPr>
         <p:txBody>
-          <a:bodyPr wrap="square" lIns="0" tIns="0" rIns="0" bIns="0" rtlCol="0" anchor="ctr"/>
+          <a:bodyPr wrap="none" lIns="0" tIns="0" rIns="0" bIns="0" rtlCol="0" anchor="ctr"/>
           <a:lstStyle/>
           <a:p>
             <a:pPr algn="ctr" indent="0" marL="0">
@@ -8367,7 +8367,7 @@
           <a:ln/>
         </p:spPr>
         <p:txBody>
-          <a:bodyPr wrap="square" lIns="0" tIns="0" rIns="0" bIns="0" rtlCol="0" anchor="ctr"/>
+          <a:bodyPr wrap="none" lIns="0" tIns="0" rIns="0" bIns="0" rtlCol="0" anchor="ctr"/>
           <a:lstStyle/>
           <a:p>
             <a:pPr algn="ctr" indent="0" marL="0">
@@ -8427,7 +8427,7 @@
           <a:ln/>
         </p:spPr>
         <p:txBody>
-          <a:bodyPr wrap="square" lIns="0" tIns="0" rIns="0" bIns="0" rtlCol="0" anchor="ctr"/>
+          <a:bodyPr wrap="none" lIns="0" tIns="0" rIns="0" bIns="0" rtlCol="0" anchor="ctr"/>
           <a:lstStyle/>
           <a:p>
             <a:pPr algn="ctr" indent="0" marL="0">
@@ -8552,11 +8552,11 @@
         <p:spPr>
           <a:xfrm>
             <a:off x="502920" y="1691640"/>
-            <a:ext cx="3954780" cy="4032504"/>
+            <a:ext cx="3985870" cy="4032504"/>
           </a:xfrm>
           <a:prstGeom prst="roundRect">
             <a:avLst>
-              <a:gd name="adj" fmla="val 1850"/>
+              <a:gd name="adj" fmla="val 1835"/>
             </a:avLst>
           </a:prstGeom>
           <a:solidFill>
@@ -8574,7 +8574,7 @@
         <p:spPr>
           <a:xfrm>
             <a:off x="621792" y="1828800"/>
-            <a:ext cx="3717036" cy="457200"/>
+            <a:ext cx="3748126" cy="457200"/>
           </a:xfrm>
           <a:prstGeom prst="rect">
             <a:avLst/>
@@ -8613,7 +8613,7 @@
         <p:spPr>
           <a:xfrm>
             <a:off x="621792" y="2395728"/>
-            <a:ext cx="3717036" cy="420624"/>
+            <a:ext cx="3748126" cy="420624"/>
           </a:xfrm>
           <a:prstGeom prst="rect">
             <a:avLst/>
@@ -8652,7 +8652,7 @@
         <p:spPr>
           <a:xfrm>
             <a:off x="621792" y="3090672"/>
-            <a:ext cx="3717036" cy="420624"/>
+            <a:ext cx="3748126" cy="420624"/>
           </a:xfrm>
           <a:prstGeom prst="rect">
             <a:avLst/>
@@ -8702,7 +8702,7 @@
         <p:spPr>
           <a:xfrm>
             <a:off x="896112" y="3511296"/>
-            <a:ext cx="3442716" cy="420624"/>
+            <a:ext cx="3473806" cy="420624"/>
           </a:xfrm>
           <a:prstGeom prst="rect">
             <a:avLst/>
@@ -8741,7 +8741,7 @@
         <p:spPr>
           <a:xfrm>
             <a:off x="621792" y="4206240"/>
-            <a:ext cx="3717036" cy="420624"/>
+            <a:ext cx="3748126" cy="420624"/>
           </a:xfrm>
           <a:prstGeom prst="rect">
             <a:avLst/>
@@ -8765,7 +8765,7 @@
                 <a:ea typeface="メイリオ" pitchFamily="34" charset="-122"/>
                 <a:cs typeface="メイリオ" pitchFamily="34" charset="-120"/>
               </a:rPr>
-              <a:t>他の薬の</a:t>
+              <a:t>他の薬の必要量を減らす</a:t>
             </a:r>
             <a:endParaRPr lang="ja-JP" sz="2200" dirty="0"/>
           </a:p>
@@ -8773,57 +8773,18 @@
       </p:sp>
       <p:sp>
         <p:nvSpPr>
-          <p:cNvPr id="17" name="Text 15"/>
-          <p:cNvSpPr txBox="1"/>
-          <p:nvPr/>
-        </p:nvSpPr>
-        <p:spPr>
-          <a:xfrm>
-            <a:off x="896112" y="4626864"/>
-            <a:ext cx="3442716" cy="420624"/>
-          </a:xfrm>
-          <a:prstGeom prst="rect">
-            <a:avLst/>
-          </a:prstGeom>
-          <a:noFill/>
-          <a:ln/>
-        </p:spPr>
-        <p:txBody>
-          <a:bodyPr wrap="square" lIns="0" tIns="0" rIns="0" bIns="0" rtlCol="0" anchor="t"/>
-          <a:lstStyle/>
-          <a:p>
-            <a:pPr algn="l" indent="0" marL="0">
-              <a:buNone/>
-            </a:pPr>
-            <a:r>
-              <a:rPr lang="ja-JP" altLang="en-US" sz="2200" dirty="0">
-                <a:solidFill>
-                  <a:srgbClr val="262626"/>
-                </a:solidFill>
-                <a:latin typeface="メイリオ" pitchFamily="34" charset="0"/>
-                <a:ea typeface="メイリオ" pitchFamily="34" charset="-122"/>
-                <a:cs typeface="メイリオ" pitchFamily="34" charset="-120"/>
-              </a:rPr>
-              <a:t>必要量を減らす</a:t>
-            </a:r>
-            <a:endParaRPr lang="ja-JP" sz="2200" dirty="0"/>
-          </a:p>
-        </p:txBody>
-      </p:sp>
-      <p:sp>
-        <p:nvSpPr>
-          <p:cNvPr id="18" name="Shape 16"/>
+          <p:cNvPr id="17" name="Shape 15"/>
           <p:cNvSpPr/>
           <p:nvPr/>
         </p:nvSpPr>
         <p:spPr>
           <a:xfrm>
-            <a:off x="4677156" y="1691640"/>
-            <a:ext cx="3954780" cy="4032504"/>
+            <a:off x="4708246" y="1691640"/>
+            <a:ext cx="3985870" cy="4032504"/>
           </a:xfrm>
           <a:prstGeom prst="roundRect">
             <a:avLst>
-              <a:gd name="adj" fmla="val 1850"/>
+              <a:gd name="adj" fmla="val 1835"/>
             </a:avLst>
           </a:prstGeom>
           <a:solidFill>
@@ -8834,14 +8795,53 @@
       </p:sp>
       <p:sp>
         <p:nvSpPr>
+          <p:cNvPr id="18" name="Text 16"/>
+          <p:cNvSpPr txBox="1"/>
+          <p:nvPr/>
+        </p:nvSpPr>
+        <p:spPr>
+          <a:xfrm>
+            <a:off x="4827118" y="1828800"/>
+            <a:ext cx="3748126" cy="457200"/>
+          </a:xfrm>
+          <a:prstGeom prst="rect">
+            <a:avLst/>
+          </a:prstGeom>
+          <a:noFill/>
+          <a:ln/>
+        </p:spPr>
+        <p:txBody>
+          <a:bodyPr wrap="square" lIns="0" tIns="0" rIns="0" bIns="0" rtlCol="0" anchor="t"/>
+          <a:lstStyle/>
+          <a:p>
+            <a:pPr algn="l" indent="0" marL="0">
+              <a:buNone/>
+            </a:pPr>
+            <a:r>
+              <a:rPr lang="ja-JP" altLang="en-US" sz="2400" b="1" dirty="0">
+                <a:solidFill>
+                  <a:srgbClr val="D55E00"/>
+                </a:solidFill>
+                <a:latin typeface="メイリオ" pitchFamily="34" charset="0"/>
+                <a:ea typeface="メイリオ" pitchFamily="34" charset="-122"/>
+                <a:cs typeface="メイリオ" pitchFamily="34" charset="-120"/>
+              </a:rPr>
+              <a:t>注意</a:t>
+            </a:r>
+            <a:endParaRPr lang="ja-JP" sz="2400" dirty="0"/>
+          </a:p>
+        </p:txBody>
+      </p:sp>
+      <p:sp>
+        <p:nvSpPr>
           <p:cNvPr id="19" name="Text 17"/>
           <p:cNvSpPr txBox="1"/>
           <p:nvPr/>
         </p:nvSpPr>
         <p:spPr>
           <a:xfrm>
-            <a:off x="4796028" y="1828800"/>
-            <a:ext cx="3717036" cy="457200"/>
+            <a:off x="4827118" y="2395728"/>
+            <a:ext cx="3748126" cy="420624"/>
           </a:xfrm>
           <a:prstGeom prst="rect">
             <a:avLst/>
@@ -8857,17 +8857,28 @@
               <a:buNone/>
             </a:pPr>
             <a:r>
-              <a:rPr lang="ja-JP" altLang="en-US" sz="2400" b="1" dirty="0">
-                <a:solidFill>
-                  <a:srgbClr val="D55E00"/>
-                </a:solidFill>
-                <a:latin typeface="メイリオ" pitchFamily="34" charset="0"/>
-                <a:ea typeface="メイリオ" pitchFamily="34" charset="-122"/>
-                <a:cs typeface="メイリオ" pitchFamily="34" charset="-120"/>
-              </a:rPr>
-              <a:t>注意</a:t>
-            </a:r>
-            <a:endParaRPr lang="ja-JP" sz="2400" dirty="0"/>
+              <a:rPr lang="ja-JP" altLang="en-US" sz="2200" b="1" dirty="0">
+                <a:solidFill>
+                  <a:srgbClr val="262626"/>
+                </a:solidFill>
+                <a:latin typeface="メイリオ" pitchFamily="34" charset="0"/>
+                <a:ea typeface="メイリオ" pitchFamily="34" charset="-122"/>
+                <a:cs typeface="メイリオ" pitchFamily="34" charset="-120"/>
+              </a:rPr>
+              <a:t>閉鎖腔に広がる</a:t>
+            </a:r>
+            <a:r>
+              <a:rPr lang="ja-JP" altLang="en-US" sz="2200" dirty="0">
+                <a:solidFill>
+                  <a:srgbClr val="262626"/>
+                </a:solidFill>
+                <a:latin typeface="メイリオ" pitchFamily="34" charset="0"/>
+                <a:ea typeface="メイリオ" pitchFamily="34" charset="-122"/>
+                <a:cs typeface="メイリオ" pitchFamily="34" charset="-120"/>
+              </a:rPr>
+              <a:t>：気胸・</a:t>
+            </a:r>
+            <a:endParaRPr lang="ja-JP" sz="2200" dirty="0"/>
           </a:p>
         </p:txBody>
       </p:sp>
@@ -8879,8 +8890,8 @@
         </p:nvSpPr>
         <p:spPr>
           <a:xfrm>
-            <a:off x="4796028" y="2395728"/>
-            <a:ext cx="3717036" cy="420624"/>
+            <a:off x="5101438" y="2816352"/>
+            <a:ext cx="3473806" cy="420624"/>
           </a:xfrm>
           <a:prstGeom prst="rect">
             <a:avLst/>
@@ -8896,7 +8907,7 @@
               <a:buNone/>
             </a:pPr>
             <a:r>
-              <a:rPr lang="ja-JP" altLang="en-US" sz="2200" b="1" dirty="0">
+              <a:rPr lang="ja-JP" altLang="en-US" sz="2200" dirty="0">
                 <a:solidFill>
                   <a:srgbClr val="262626"/>
                 </a:solidFill>
@@ -8904,18 +8915,7 @@
                 <a:ea typeface="メイリオ" pitchFamily="34" charset="-122"/>
                 <a:cs typeface="メイリオ" pitchFamily="34" charset="-120"/>
               </a:rPr>
-              <a:t>閉鎖腔に広がる</a:t>
-            </a:r>
-            <a:r>
-              <a:rPr lang="ja-JP" altLang="en-US" sz="2200" dirty="0">
-                <a:solidFill>
-                  <a:srgbClr val="262626"/>
-                </a:solidFill>
-                <a:latin typeface="メイリオ" pitchFamily="34" charset="0"/>
-                <a:ea typeface="メイリオ" pitchFamily="34" charset="-122"/>
-                <a:cs typeface="メイリオ" pitchFamily="34" charset="-120"/>
-              </a:rPr>
-              <a:t>：気胸・</a:t>
+              <a:t>腸閉塞・中耳・眼内ガス</a:t>
             </a:r>
             <a:endParaRPr lang="ja-JP" sz="2200" dirty="0"/>
           </a:p>
@@ -8929,8 +8929,8 @@
         </p:nvSpPr>
         <p:spPr>
           <a:xfrm>
-            <a:off x="5070348" y="2816352"/>
-            <a:ext cx="3442716" cy="420624"/>
+            <a:off x="4827118" y="3459175"/>
+            <a:ext cx="3748126" cy="420624"/>
           </a:xfrm>
           <a:prstGeom prst="rect">
             <a:avLst/>
@@ -8954,7 +8954,7 @@
                 <a:ea typeface="メイリオ" pitchFamily="34" charset="-122"/>
                 <a:cs typeface="メイリオ" pitchFamily="34" charset="-120"/>
               </a:rPr>
-              <a:t>腸閉塞・中耳・眼内ガス</a:t>
+              <a:t>カフ圧が上がる</a:t>
             </a:r>
             <a:endParaRPr lang="ja-JP" sz="2200" dirty="0"/>
           </a:p>
@@ -8968,8 +8968,8 @@
         </p:nvSpPr>
         <p:spPr>
           <a:xfrm>
-            <a:off x="4796028" y="3459175"/>
-            <a:ext cx="3717036" cy="420624"/>
+            <a:off x="4827118" y="4102913"/>
+            <a:ext cx="3748126" cy="420624"/>
           </a:xfrm>
           <a:prstGeom prst="rect">
             <a:avLst/>
@@ -8993,7 +8993,7 @@
                 <a:ea typeface="メイリオ" pitchFamily="34" charset="-122"/>
                 <a:cs typeface="メイリオ" pitchFamily="34" charset="-120"/>
               </a:rPr>
-              <a:t>カフ圧が上がる</a:t>
+              <a:t>終了時の拡散性低酸素</a:t>
             </a:r>
             <a:endParaRPr lang="ja-JP" sz="2200" dirty="0"/>
           </a:p>
@@ -9007,8 +9007,8 @@
         </p:nvSpPr>
         <p:spPr>
           <a:xfrm>
-            <a:off x="4796028" y="4102913"/>
-            <a:ext cx="3717036" cy="420624"/>
+            <a:off x="4827118" y="4745736"/>
+            <a:ext cx="3748126" cy="420624"/>
           </a:xfrm>
           <a:prstGeom prst="rect">
             <a:avLst/>
@@ -9032,7 +9032,7 @@
                 <a:ea typeface="メイリオ" pitchFamily="34" charset="-122"/>
                 <a:cs typeface="メイリオ" pitchFamily="34" charset="-120"/>
               </a:rPr>
-              <a:t>終了時の拡散性低酸素</a:t>
+              <a:t>長時間（1 時間超）で</a:t>
             </a:r>
             <a:endParaRPr lang="ja-JP" sz="2200" dirty="0"/>
           </a:p>
@@ -9046,8 +9046,8 @@
         </p:nvSpPr>
         <p:spPr>
           <a:xfrm>
-            <a:off x="4796028" y="4745736"/>
-            <a:ext cx="3717036" cy="420624"/>
+            <a:off x="5101438" y="5166360"/>
+            <a:ext cx="3473806" cy="420624"/>
           </a:xfrm>
           <a:prstGeom prst="rect">
             <a:avLst/>
@@ -9071,7 +9071,7 @@
                 <a:ea typeface="メイリオ" pitchFamily="34" charset="-122"/>
                 <a:cs typeface="メイリオ" pitchFamily="34" charset="-120"/>
               </a:rPr>
-              <a:t>長時間（1 時間超）で</a:t>
+              <a:t>PONV を増やす</a:t>
             </a:r>
             <a:endParaRPr lang="ja-JP" sz="2200" dirty="0"/>
           </a:p>
@@ -9079,57 +9079,18 @@
       </p:sp>
       <p:sp>
         <p:nvSpPr>
-          <p:cNvPr id="25" name="Text 23"/>
-          <p:cNvSpPr txBox="1"/>
-          <p:nvPr/>
-        </p:nvSpPr>
-        <p:spPr>
-          <a:xfrm>
-            <a:off x="5070348" y="5166360"/>
-            <a:ext cx="3442716" cy="420624"/>
-          </a:xfrm>
-          <a:prstGeom prst="rect">
-            <a:avLst/>
-          </a:prstGeom>
-          <a:noFill/>
-          <a:ln/>
-        </p:spPr>
-        <p:txBody>
-          <a:bodyPr wrap="square" lIns="0" tIns="0" rIns="0" bIns="0" rtlCol="0" anchor="t"/>
-          <a:lstStyle/>
-          <a:p>
-            <a:pPr algn="l" indent="0" marL="0">
-              <a:buNone/>
-            </a:pPr>
-            <a:r>
-              <a:rPr lang="ja-JP" altLang="en-US" sz="2200" dirty="0">
-                <a:solidFill>
-                  <a:srgbClr val="262626"/>
-                </a:solidFill>
-                <a:latin typeface="メイリオ" pitchFamily="34" charset="0"/>
-                <a:ea typeface="メイリオ" pitchFamily="34" charset="-122"/>
-                <a:cs typeface="メイリオ" pitchFamily="34" charset="-120"/>
-              </a:rPr>
-              <a:t>PONV を増やす</a:t>
-            </a:r>
-            <a:endParaRPr lang="ja-JP" sz="2200" dirty="0"/>
-          </a:p>
-        </p:txBody>
-      </p:sp>
-      <p:sp>
-        <p:nvSpPr>
-          <p:cNvPr id="26" name="Shape 24"/>
+          <p:cNvPr id="25" name="Shape 23"/>
           <p:cNvSpPr/>
           <p:nvPr/>
         </p:nvSpPr>
         <p:spPr>
           <a:xfrm>
-            <a:off x="8852306" y="1691640"/>
-            <a:ext cx="2833726" cy="4032504"/>
+            <a:off x="8913571" y="1691640"/>
+            <a:ext cx="2772461" cy="4032504"/>
           </a:xfrm>
           <a:prstGeom prst="roundRect">
             <a:avLst>
-              <a:gd name="adj" fmla="val 2581"/>
+              <a:gd name="adj" fmla="val 2639"/>
             </a:avLst>
           </a:prstGeom>
           <a:solidFill>
@@ -9140,14 +9101,53 @@
       </p:sp>
       <p:sp>
         <p:nvSpPr>
+          <p:cNvPr id="26" name="Text 24"/>
+          <p:cNvSpPr txBox="1"/>
+          <p:nvPr/>
+        </p:nvSpPr>
+        <p:spPr>
+          <a:xfrm>
+            <a:off x="9032443" y="1828800"/>
+            <a:ext cx="2534717" cy="457200"/>
+          </a:xfrm>
+          <a:prstGeom prst="rect">
+            <a:avLst/>
+          </a:prstGeom>
+          <a:noFill/>
+          <a:ln/>
+        </p:spPr>
+        <p:txBody>
+          <a:bodyPr wrap="square" lIns="0" tIns="0" rIns="0" bIns="0" rtlCol="0" anchor="t"/>
+          <a:lstStyle/>
+          <a:p>
+            <a:pPr algn="l" indent="0" marL="0">
+              <a:buNone/>
+            </a:pPr>
+            <a:r>
+              <a:rPr lang="ja-JP" altLang="en-US" sz="2400" b="1" dirty="0">
+                <a:solidFill>
+                  <a:srgbClr val="0072B2"/>
+                </a:solidFill>
+                <a:latin typeface="メイリオ" pitchFamily="34" charset="0"/>
+                <a:ea typeface="メイリオ" pitchFamily="34" charset="-122"/>
+                <a:cs typeface="メイリオ" pitchFamily="34" charset="-120"/>
+              </a:rPr>
+              <a:t>その他</a:t>
+            </a:r>
+            <a:endParaRPr lang="ja-JP" sz="2400" dirty="0"/>
+          </a:p>
+        </p:txBody>
+      </p:sp>
+      <p:sp>
+        <p:nvSpPr>
           <p:cNvPr id="27" name="Text 25"/>
           <p:cNvSpPr txBox="1"/>
           <p:nvPr/>
         </p:nvSpPr>
         <p:spPr>
           <a:xfrm>
-            <a:off x="8971178" y="1828800"/>
-            <a:ext cx="2595982" cy="457200"/>
+            <a:off x="9032443" y="2395728"/>
+            <a:ext cx="2534717" cy="420624"/>
           </a:xfrm>
           <a:prstGeom prst="rect">
             <a:avLst/>
@@ -9163,17 +9163,17 @@
               <a:buNone/>
             </a:pPr>
             <a:r>
-              <a:rPr lang="ja-JP" altLang="en-US" sz="2400" b="1" dirty="0">
-                <a:solidFill>
-                  <a:srgbClr val="0072B2"/>
-                </a:solidFill>
-                <a:latin typeface="メイリオ" pitchFamily="34" charset="0"/>
-                <a:ea typeface="メイリオ" pitchFamily="34" charset="-122"/>
-                <a:cs typeface="メイリオ" pitchFamily="34" charset="-120"/>
-              </a:rPr>
-              <a:t>その他</a:t>
-            </a:r>
-            <a:endParaRPr lang="ja-JP" sz="2400" dirty="0"/>
+              <a:rPr lang="ja-JP" altLang="en-US" sz="2200" dirty="0">
+                <a:solidFill>
+                  <a:srgbClr val="262626"/>
+                </a:solidFill>
+                <a:latin typeface="メイリオ" pitchFamily="34" charset="0"/>
+                <a:ea typeface="メイリオ" pitchFamily="34" charset="-122"/>
+                <a:cs typeface="メイリオ" pitchFamily="34" charset="-120"/>
+              </a:rPr>
+              <a:t>ビタミン B12 を</a:t>
+            </a:r>
+            <a:endParaRPr lang="ja-JP" sz="2200" dirty="0"/>
           </a:p>
         </p:txBody>
       </p:sp>
@@ -9185,8 +9185,8 @@
         </p:nvSpPr>
         <p:spPr>
           <a:xfrm>
-            <a:off x="8971178" y="2395728"/>
-            <a:ext cx="2595982" cy="420624"/>
+            <a:off x="9306763" y="2816352"/>
+            <a:ext cx="2260397" cy="420624"/>
           </a:xfrm>
           <a:prstGeom prst="rect">
             <a:avLst/>
@@ -9210,7 +9210,7 @@
                 <a:ea typeface="メイリオ" pitchFamily="34" charset="-122"/>
                 <a:cs typeface="メイリオ" pitchFamily="34" charset="-120"/>
               </a:rPr>
-              <a:t>ビタミン B12 を</a:t>
+              <a:t>不活化</a:t>
             </a:r>
             <a:endParaRPr lang="ja-JP" sz="2200" dirty="0"/>
           </a:p>
@@ -9224,8 +9224,8 @@
         </p:nvSpPr>
         <p:spPr>
           <a:xfrm>
-            <a:off x="9245498" y="2816352"/>
-            <a:ext cx="2321662" cy="420624"/>
+            <a:off x="9032443" y="3511296"/>
+            <a:ext cx="2534717" cy="420624"/>
           </a:xfrm>
           <a:prstGeom prst="rect">
             <a:avLst/>
@@ -9249,7 +9249,7 @@
                 <a:ea typeface="メイリオ" pitchFamily="34" charset="-122"/>
                 <a:cs typeface="メイリオ" pitchFamily="34" charset="-120"/>
               </a:rPr>
-              <a:t>不活化</a:t>
+              <a:t>温室効果ガス</a:t>
             </a:r>
             <a:endParaRPr lang="ja-JP" sz="2200" dirty="0"/>
           </a:p>
@@ -9263,47 +9263,8 @@
         </p:nvSpPr>
         <p:spPr>
           <a:xfrm>
-            <a:off x="8971178" y="3511296"/>
-            <a:ext cx="2595982" cy="420624"/>
-          </a:xfrm>
-          <a:prstGeom prst="rect">
-            <a:avLst/>
-          </a:prstGeom>
-          <a:noFill/>
-          <a:ln/>
-        </p:spPr>
-        <p:txBody>
-          <a:bodyPr wrap="square" lIns="0" tIns="0" rIns="0" bIns="0" rtlCol="0" anchor="t"/>
-          <a:lstStyle/>
-          <a:p>
-            <a:pPr algn="l" indent="0" marL="0">
-              <a:buNone/>
-            </a:pPr>
-            <a:r>
-              <a:rPr lang="ja-JP" altLang="en-US" sz="2200" dirty="0">
-                <a:solidFill>
-                  <a:srgbClr val="262626"/>
-                </a:solidFill>
-                <a:latin typeface="メイリオ" pitchFamily="34" charset="0"/>
-                <a:ea typeface="メイリオ" pitchFamily="34" charset="-122"/>
-                <a:cs typeface="メイリオ" pitchFamily="34" charset="-120"/>
-              </a:rPr>
-              <a:t>温室効果ガス</a:t>
-            </a:r>
-            <a:endParaRPr lang="ja-JP" sz="2200" dirty="0"/>
-          </a:p>
-        </p:txBody>
-      </p:sp>
-      <p:sp>
-        <p:nvSpPr>
-          <p:cNvPr id="31" name="Text 29"/>
-          <p:cNvSpPr txBox="1"/>
-          <p:nvPr/>
-        </p:nvSpPr>
-        <p:spPr>
-          <a:xfrm>
-            <a:off x="8971178" y="4206240"/>
-            <a:ext cx="2595982" cy="420624"/>
+            <a:off x="9032443" y="4206240"/>
+            <a:ext cx="2534717" cy="420624"/>
           </a:xfrm>
           <a:prstGeom prst="rect">
             <a:avLst/>
@@ -9451,7 +9412,7 @@
           <a:ln/>
         </p:spPr>
         <p:txBody>
-          <a:bodyPr wrap="square" lIns="0" tIns="0" rIns="0" bIns="0" rtlCol="0" anchor="ctr"/>
+          <a:bodyPr wrap="none" lIns="0" tIns="0" rIns="0" bIns="0" rtlCol="0" anchor="ctr"/>
           <a:lstStyle/>
           <a:p>
             <a:pPr algn="ctr" indent="0" marL="0">
@@ -9494,7 +9455,7 @@
           <a:ln/>
         </p:spPr>
         <p:txBody>
-          <a:bodyPr wrap="square" lIns="0" tIns="0" rIns="0" bIns="0" rtlCol="0" anchor="ctr"/>
+          <a:bodyPr wrap="none" lIns="0" tIns="0" rIns="0" bIns="0" rtlCol="0" anchor="ctr"/>
           <a:lstStyle/>
           <a:p>
             <a:pPr algn="ctr" indent="0" marL="0">
@@ -9537,7 +9498,7 @@
           <a:ln/>
         </p:spPr>
         <p:txBody>
-          <a:bodyPr wrap="square" lIns="0" tIns="0" rIns="0" bIns="0" rtlCol="0" anchor="ctr"/>
+          <a:bodyPr wrap="none" lIns="0" tIns="0" rIns="0" bIns="0" rtlCol="0" anchor="ctr"/>
           <a:lstStyle/>
           <a:p>
             <a:pPr algn="ctr" indent="0" marL="0">
@@ -9597,7 +9558,7 @@
           <a:ln/>
         </p:spPr>
         <p:txBody>
-          <a:bodyPr wrap="square" lIns="0" tIns="0" rIns="0" bIns="0" rtlCol="0" anchor="ctr"/>
+          <a:bodyPr wrap="none" lIns="0" tIns="0" rIns="0" bIns="0" rtlCol="0" anchor="ctr"/>
           <a:lstStyle/>
           <a:p>
             <a:pPr algn="ctr" indent="0" marL="0">
@@ -9657,7 +9618,7 @@
           <a:ln/>
         </p:spPr>
         <p:txBody>
-          <a:bodyPr wrap="square" lIns="0" tIns="0" rIns="0" bIns="0" rtlCol="0" anchor="ctr"/>
+          <a:bodyPr wrap="none" lIns="0" tIns="0" rIns="0" bIns="0" rtlCol="0" anchor="ctr"/>
           <a:lstStyle/>
           <a:p>
             <a:pPr algn="ctr" indent="0" marL="0">
@@ -10760,7 +10721,7 @@
           <a:ln/>
         </p:spPr>
         <p:txBody>
-          <a:bodyPr wrap="square" lIns="0" tIns="0" rIns="0" bIns="0" rtlCol="0" anchor="ctr"/>
+          <a:bodyPr wrap="none" lIns="0" tIns="0" rIns="0" bIns="0" rtlCol="0" anchor="ctr"/>
           <a:lstStyle/>
           <a:p>
             <a:pPr algn="ctr" indent="0" marL="0">
@@ -10803,7 +10764,7 @@
           <a:ln/>
         </p:spPr>
         <p:txBody>
-          <a:bodyPr wrap="square" lIns="0" tIns="0" rIns="0" bIns="0" rtlCol="0" anchor="ctr"/>
+          <a:bodyPr wrap="none" lIns="0" tIns="0" rIns="0" bIns="0" rtlCol="0" anchor="ctr"/>
           <a:lstStyle/>
           <a:p>
             <a:pPr algn="ctr" indent="0" marL="0">
@@ -10846,7 +10807,7 @@
           <a:ln/>
         </p:spPr>
         <p:txBody>
-          <a:bodyPr wrap="square" lIns="0" tIns="0" rIns="0" bIns="0" rtlCol="0" anchor="ctr"/>
+          <a:bodyPr wrap="none" lIns="0" tIns="0" rIns="0" bIns="0" rtlCol="0" anchor="ctr"/>
           <a:lstStyle/>
           <a:p>
             <a:pPr algn="ctr" indent="0" marL="0">
@@ -10906,7 +10867,7 @@
           <a:ln/>
         </p:spPr>
         <p:txBody>
-          <a:bodyPr wrap="square" lIns="0" tIns="0" rIns="0" bIns="0" rtlCol="0" anchor="ctr"/>
+          <a:bodyPr wrap="none" lIns="0" tIns="0" rIns="0" bIns="0" rtlCol="0" anchor="ctr"/>
           <a:lstStyle/>
           <a:p>
             <a:pPr algn="ctr" indent="0" marL="0">
@@ -10966,7 +10927,7 @@
           <a:ln/>
         </p:spPr>
         <p:txBody>
-          <a:bodyPr wrap="square" lIns="0" tIns="0" rIns="0" bIns="0" rtlCol="0" anchor="ctr"/>
+          <a:bodyPr wrap="none" lIns="0" tIns="0" rIns="0" bIns="0" rtlCol="0" anchor="ctr"/>
           <a:lstStyle/>
           <a:p>
             <a:pPr algn="ctr" indent="0" marL="0">
@@ -11091,7 +11052,7 @@
         <p:spPr>
           <a:xfrm>
             <a:off x="502920" y="1737360"/>
-            <a:ext cx="3611880" cy="1060704"/>
+            <a:ext cx="3392424" cy="1060704"/>
           </a:xfrm>
           <a:prstGeom prst="roundRect">
             <a:avLst>
@@ -11108,7 +11069,7 @@
           </a:ln>
         </p:spPr>
         <p:txBody>
-          <a:bodyPr wrap="square" lIns="91440" tIns="91440" rIns="91440" bIns="91440" rtlCol="0" anchor="ctr"/>
+          <a:bodyPr wrap="square" lIns="73152" tIns="73152" rIns="73152" bIns="73152" rtlCol="0" anchor="ctr"/>
           <a:lstStyle/>
           <a:p>
             <a:pPr algn="ctr" indent="0" marL="0">
@@ -11154,8 +11115,8 @@
         </p:nvSpPr>
         <p:spPr>
           <a:xfrm>
-            <a:off x="4187952" y="2267712"/>
-            <a:ext cx="256032" cy="0"/>
+            <a:off x="3959352" y="2267712"/>
+            <a:ext cx="210312" cy="0"/>
           </a:xfrm>
           <a:prstGeom prst="line">
             <a:avLst/>
@@ -11177,7 +11138,7 @@
         </p:nvSpPr>
         <p:spPr>
           <a:xfrm>
-            <a:off x="4425696" y="2157984"/>
+            <a:off x="4151376" y="2157984"/>
             <a:ext cx="182880" cy="219456"/>
           </a:xfrm>
           <a:custGeom>
@@ -11220,8 +11181,8 @@
         </p:nvSpPr>
         <p:spPr>
           <a:xfrm>
-            <a:off x="4681728" y="1737360"/>
-            <a:ext cx="4191610" cy="1060704"/>
+            <a:off x="4398264" y="1737360"/>
+            <a:ext cx="3392424" cy="1060704"/>
           </a:xfrm>
           <a:prstGeom prst="roundRect">
             <a:avLst>
@@ -11238,7 +11199,7 @@
           </a:ln>
         </p:spPr>
         <p:txBody>
-          <a:bodyPr wrap="square" lIns="91440" tIns="91440" rIns="91440" bIns="91440" rtlCol="0" anchor="ctr"/>
+          <a:bodyPr wrap="square" lIns="73152" tIns="73152" rIns="73152" bIns="73152" rtlCol="0" anchor="ctr"/>
           <a:lstStyle/>
           <a:p>
             <a:pPr algn="ctr" indent="0" marL="0">
@@ -11253,7 +11214,7 @@
                 <a:ea typeface="メイリオ" pitchFamily="34" charset="-122"/>
                 <a:cs typeface="メイリオ" pitchFamily="34" charset="-120"/>
               </a:rPr>
-              <a:t>② 呼気濃度が</a:t>
+              <a:t>② 呼気濃度が目標に</a:t>
             </a:r>
             <a:endParaRPr lang="ja-JP" sz="2400" dirty="0"/>
           </a:p>
@@ -11270,7 +11231,7 @@
                 <a:ea typeface="メイリオ" pitchFamily="34" charset="-122"/>
                 <a:cs typeface="メイリオ" pitchFamily="34" charset="-120"/>
               </a:rPr>
-              <a:t>目標に達したら低流量へ</a:t>
+              <a:t>達したら低流量へ</a:t>
             </a:r>
             <a:endParaRPr lang="ja-JP" sz="2400" dirty="0"/>
           </a:p>
@@ -11284,8 +11245,8 @@
         </p:nvSpPr>
         <p:spPr>
           <a:xfrm>
-            <a:off x="8946490" y="2267712"/>
-            <a:ext cx="256032" cy="0"/>
+            <a:off x="7854696" y="2267712"/>
+            <a:ext cx="210312" cy="0"/>
           </a:xfrm>
           <a:prstGeom prst="line">
             <a:avLst/>
@@ -11307,7 +11268,7 @@
         </p:nvSpPr>
         <p:spPr>
           <a:xfrm>
-            <a:off x="9184234" y="2157984"/>
+            <a:off x="8046720" y="2157984"/>
             <a:ext cx="182880" cy="219456"/>
           </a:xfrm>
           <a:custGeom>
@@ -11350,72 +11311,8 @@
         </p:nvSpPr>
         <p:spPr>
           <a:xfrm>
-            <a:off x="9440266" y="1737360"/>
-            <a:ext cx="2245766" cy="1060704"/>
-          </a:xfrm>
-          <a:prstGeom prst="roundRect">
-            <a:avLst>
-              <a:gd name="adj" fmla="val 10345"/>
-            </a:avLst>
-          </a:prstGeom>
-          <a:solidFill>
-            <a:srgbClr val="F2F2F2"/>
-          </a:solidFill>
-          <a:ln w="28575">
-            <a:solidFill>
-              <a:srgbClr val="00A8AA"/>
-            </a:solidFill>
-          </a:ln>
-        </p:spPr>
-        <p:txBody>
-          <a:bodyPr wrap="square" lIns="91440" tIns="91440" rIns="91440" bIns="91440" rtlCol="0" anchor="ctr"/>
-          <a:lstStyle/>
-          <a:p>
-            <a:pPr algn="ctr" indent="0" marL="0">
-              <a:buNone/>
-            </a:pPr>
-            <a:r>
-              <a:rPr lang="ja-JP" altLang="en-US" sz="2400" b="1" dirty="0">
-                <a:solidFill>
-                  <a:srgbClr val="262626"/>
-                </a:solidFill>
-                <a:latin typeface="メイリオ" pitchFamily="34" charset="0"/>
-                <a:ea typeface="メイリオ" pitchFamily="34" charset="-122"/>
-                <a:cs typeface="メイリオ" pitchFamily="34" charset="-120"/>
-              </a:rPr>
-              <a:t>③ 年齢補正</a:t>
-            </a:r>
-            <a:endParaRPr lang="ja-JP" sz="2400" dirty="0"/>
-          </a:p>
-          <a:p>
-            <a:pPr algn="ctr" indent="0" marL="0">
-              <a:buNone/>
-            </a:pPr>
-            <a:r>
-              <a:rPr lang="ja-JP" altLang="en-US" sz="2400" b="1" dirty="0">
-                <a:solidFill>
-                  <a:srgbClr val="262626"/>
-                </a:solidFill>
-                <a:latin typeface="メイリオ" pitchFamily="34" charset="0"/>
-                <a:ea typeface="メイリオ" pitchFamily="34" charset="-122"/>
-                <a:cs typeface="メイリオ" pitchFamily="34" charset="-120"/>
-              </a:rPr>
-              <a:t>MAC で調節</a:t>
-            </a:r>
-            <a:endParaRPr lang="ja-JP" sz="2400" dirty="0"/>
-          </a:p>
-        </p:txBody>
-      </p:sp>
-      <p:sp>
-        <p:nvSpPr>
-          <p:cNvPr id="18" name="Text 16"/>
-          <p:cNvSpPr/>
-          <p:nvPr/>
-        </p:nvSpPr>
-        <p:spPr>
-          <a:xfrm>
-            <a:off x="502920" y="3364992"/>
-            <a:ext cx="3611880" cy="1060704"/>
+            <a:off x="8293608" y="1737360"/>
+            <a:ext cx="3392424" cy="1060704"/>
           </a:xfrm>
           <a:prstGeom prst="roundRect">
             <a:avLst>
@@ -11432,7 +11329,71 @@
           </a:ln>
         </p:spPr>
         <p:txBody>
-          <a:bodyPr wrap="square" lIns="91440" tIns="91440" rIns="91440" bIns="91440" rtlCol="0" anchor="ctr"/>
+          <a:bodyPr wrap="square" lIns="73152" tIns="73152" rIns="73152" bIns="73152" rtlCol="0" anchor="ctr"/>
+          <a:lstStyle/>
+          <a:p>
+            <a:pPr algn="ctr" indent="0" marL="0">
+              <a:buNone/>
+            </a:pPr>
+            <a:r>
+              <a:rPr lang="ja-JP" altLang="en-US" sz="2400" b="1" dirty="0">
+                <a:solidFill>
+                  <a:srgbClr val="262626"/>
+                </a:solidFill>
+                <a:latin typeface="メイリオ" pitchFamily="34" charset="0"/>
+                <a:ea typeface="メイリオ" pitchFamily="34" charset="-122"/>
+                <a:cs typeface="メイリオ" pitchFamily="34" charset="-120"/>
+              </a:rPr>
+              <a:t>③ 年齢補正</a:t>
+            </a:r>
+            <a:endParaRPr lang="ja-JP" sz="2400" dirty="0"/>
+          </a:p>
+          <a:p>
+            <a:pPr algn="ctr" indent="0" marL="0">
+              <a:buNone/>
+            </a:pPr>
+            <a:r>
+              <a:rPr lang="ja-JP" altLang="en-US" sz="2400" b="1" dirty="0">
+                <a:solidFill>
+                  <a:srgbClr val="262626"/>
+                </a:solidFill>
+                <a:latin typeface="メイリオ" pitchFamily="34" charset="0"/>
+                <a:ea typeface="メイリオ" pitchFamily="34" charset="-122"/>
+                <a:cs typeface="メイリオ" pitchFamily="34" charset="-120"/>
+              </a:rPr>
+              <a:t>MAC で調節</a:t>
+            </a:r>
+            <a:endParaRPr lang="ja-JP" sz="2400" dirty="0"/>
+          </a:p>
+        </p:txBody>
+      </p:sp>
+      <p:sp>
+        <p:nvSpPr>
+          <p:cNvPr id="18" name="Text 16"/>
+          <p:cNvSpPr/>
+          <p:nvPr/>
+        </p:nvSpPr>
+        <p:spPr>
+          <a:xfrm>
+            <a:off x="2450592" y="3364992"/>
+            <a:ext cx="3392424" cy="1060704"/>
+          </a:xfrm>
+          <a:prstGeom prst="roundRect">
+            <a:avLst>
+              <a:gd name="adj" fmla="val 10345"/>
+            </a:avLst>
+          </a:prstGeom>
+          <a:solidFill>
+            <a:srgbClr val="F2F2F2"/>
+          </a:solidFill>
+          <a:ln w="28575">
+            <a:solidFill>
+              <a:srgbClr val="0072B2"/>
+            </a:solidFill>
+          </a:ln>
+        </p:spPr>
+        <p:txBody>
+          <a:bodyPr wrap="square" lIns="73152" tIns="73152" rIns="73152" bIns="73152" rtlCol="0" anchor="ctr"/>
           <a:lstStyle/>
           <a:p>
             <a:pPr algn="ctr" indent="0" marL="0">
@@ -11478,8 +11439,8 @@
         </p:nvSpPr>
         <p:spPr>
           <a:xfrm>
-            <a:off x="4187952" y="3895344"/>
-            <a:ext cx="256032" cy="0"/>
+            <a:off x="5907024" y="3895344"/>
+            <a:ext cx="210312" cy="0"/>
           </a:xfrm>
           <a:prstGeom prst="line">
             <a:avLst/>
@@ -11501,7 +11462,7 @@
         </p:nvSpPr>
         <p:spPr>
           <a:xfrm>
-            <a:off x="4425696" y="3785616"/>
+            <a:off x="6099048" y="3785616"/>
             <a:ext cx="182880" cy="219456"/>
           </a:xfrm>
           <a:custGeom>
@@ -11544,8 +11505,8 @@
         </p:nvSpPr>
         <p:spPr>
           <a:xfrm>
-            <a:off x="4681728" y="3364992"/>
-            <a:ext cx="4191610" cy="1060704"/>
+            <a:off x="6345936" y="3364992"/>
+            <a:ext cx="3392424" cy="1060704"/>
           </a:xfrm>
           <a:prstGeom prst="roundRect">
             <a:avLst>
@@ -11562,7 +11523,7 @@
           </a:ln>
         </p:spPr>
         <p:txBody>
-          <a:bodyPr wrap="square" lIns="91440" tIns="91440" rIns="91440" bIns="91440" rtlCol="0" anchor="ctr"/>
+          <a:bodyPr wrap="square" lIns="73152" tIns="73152" rIns="73152" bIns="73152" rtlCol="0" anchor="ctr"/>
           <a:lstStyle/>
           <a:p>
             <a:pPr algn="ctr" indent="0" marL="0">
@@ -11608,8 +11569,8 @@
         </p:nvSpPr>
         <p:spPr>
           <a:xfrm>
-            <a:off x="2308860" y="2871216"/>
-            <a:ext cx="8254289" cy="256032"/>
+            <a:off x="4146804" y="2862072"/>
+            <a:ext cx="5843016" cy="274320"/>
           </a:xfrm>
           <a:custGeom>
             <a:avLst/>
@@ -11618,18 +11579,18 @@
             <a:cxnLst/>
             <a:rect l="l" t="t" r="r" b="b"/>
             <a:pathLst>
-              <a:path w="8254289" h="256032">
+              <a:path w="5843016" h="274320">
                 <a:moveTo>
-                  <a:pt x="8254289" y="0"/>
+                  <a:pt x="5843016" y="0"/>
                 </a:moveTo>
                 <a:lnTo>
-                  <a:pt x="8254289" y="210312"/>
-                </a:lnTo>
-                <a:lnTo>
-                  <a:pt x="0" y="210312"/>
-                </a:lnTo>
-                <a:lnTo>
-                  <a:pt x="0" y="256032"/>
+                  <a:pt x="5843016" y="219456"/>
+                </a:lnTo>
+                <a:lnTo>
+                  <a:pt x="0" y="219456"/>
+                </a:lnTo>
+                <a:lnTo>
+                  <a:pt x="0" y="274320"/>
                 </a:lnTo>
               </a:path>
             </a:pathLst>
@@ -11651,7 +11612,7 @@
         </p:nvSpPr>
         <p:spPr>
           <a:xfrm>
-            <a:off x="2199132" y="3108960"/>
+            <a:off x="4037076" y="3118104"/>
             <a:ext cx="219456" cy="182880"/>
           </a:xfrm>
           <a:custGeom>
@@ -11912,7 +11873,7 @@
           <a:ln/>
         </p:spPr>
         <p:txBody>
-          <a:bodyPr wrap="square" lIns="0" tIns="0" rIns="0" bIns="0" rtlCol="0" anchor="ctr"/>
+          <a:bodyPr wrap="none" lIns="0" tIns="0" rIns="0" bIns="0" rtlCol="0" anchor="ctr"/>
           <a:lstStyle/>
           <a:p>
             <a:pPr algn="ctr" indent="0" marL="0">
@@ -11955,7 +11916,7 @@
           <a:ln/>
         </p:spPr>
         <p:txBody>
-          <a:bodyPr wrap="square" lIns="0" tIns="0" rIns="0" bIns="0" rtlCol="0" anchor="ctr"/>
+          <a:bodyPr wrap="none" lIns="0" tIns="0" rIns="0" bIns="0" rtlCol="0" anchor="ctr"/>
           <a:lstStyle/>
           <a:p>
             <a:pPr algn="ctr" indent="0" marL="0">
@@ -11998,7 +11959,7 @@
           <a:ln/>
         </p:spPr>
         <p:txBody>
-          <a:bodyPr wrap="square" lIns="0" tIns="0" rIns="0" bIns="0" rtlCol="0" anchor="ctr"/>
+          <a:bodyPr wrap="none" lIns="0" tIns="0" rIns="0" bIns="0" rtlCol="0" anchor="ctr"/>
           <a:lstStyle/>
           <a:p>
             <a:pPr algn="ctr" indent="0" marL="0">
@@ -12058,7 +12019,7 @@
           <a:ln/>
         </p:spPr>
         <p:txBody>
-          <a:bodyPr wrap="square" lIns="0" tIns="0" rIns="0" bIns="0" rtlCol="0" anchor="ctr"/>
+          <a:bodyPr wrap="none" lIns="0" tIns="0" rIns="0" bIns="0" rtlCol="0" anchor="ctr"/>
           <a:lstStyle/>
           <a:p>
             <a:pPr algn="ctr" indent="0" marL="0">
@@ -12118,7 +12079,7 @@
           <a:ln/>
         </p:spPr>
         <p:txBody>
-          <a:bodyPr wrap="square" lIns="0" tIns="0" rIns="0" bIns="0" rtlCol="0" anchor="ctr"/>
+          <a:bodyPr wrap="none" lIns="0" tIns="0" rIns="0" bIns="0" rtlCol="0" anchor="ctr"/>
           <a:lstStyle/>
           <a:p>
             <a:pPr algn="ctr" indent="0" marL="0">
